--- a/results/tcc/presentation/ensino_personalizado_de_matematica_tcc.pptx
+++ b/results/tcc/presentation/ensino_personalizado_de_matematica_tcc.pptx
@@ -6715,8 +6715,8 @@
         </p:blipFill>
         <p:spPr>
           <a:xfrm>
-            <a:off x="548640" y="1293434"/>
-            <a:ext cx="5486400" cy="2168012"/>
+            <a:off x="548640" y="1275734"/>
+            <a:ext cx="5486400" cy="2203412"/>
           </a:xfrm>
           <a:prstGeom prst="rect">
             <a:avLst/>
@@ -6906,7 +6906,7 @@
                 </a:solidFill>
                 <a:latin typeface="Arial"/>
               </a:rPr>
-              <a:t>O snapshot foi delimitado a 2015–2026, com data de corte em 31 de agosto de 2026.</a:t>
+              <a:t>O snapshot foi delimitado a 2015–2026, com data de corte em 31 de agosto de 2026. Como 2026 é parcial, sua barra não deve ser comparada diretamente com anos completos.</a:t>
             </a:r>
           </a:p>
         </p:txBody>

--- a/results/tcc/presentation/ensino_personalizado_de_matematica_tcc.pptx
+++ b/results/tcc/presentation/ensino_personalizado_de_matematica_tcc.pptx
@@ -6739,8 +6739,8 @@
         </p:blipFill>
         <p:spPr>
           <a:xfrm>
-            <a:off x="6172200" y="1230414"/>
-            <a:ext cx="5486400" cy="2294051"/>
+            <a:off x="6213560" y="1143000"/>
+            <a:ext cx="5403680" cy="2468880"/>
           </a:xfrm>
           <a:prstGeom prst="rect">
             <a:avLst/>
@@ -13740,7 +13740,7 @@
                 </a:solidFill>
                 <a:latin typeface="Arial"/>
               </a:rPr>
-              <a:t>Como identificar e sintetizar, por meio de revisão sistemática, as principais técnicas computacionais aplicadas ao ensino de matemática e converter essas evidências em uma especificação de protótipo que apoie o professor?</a:t>
+              <a:t>Como estruturar uma especificação técnica e pedagógica para apoiar a interpretação docente de evidências de desempenho em matemática, com base na literatura e nos limites das inferências sobre competências e aprendizagem?</a:t>
             </a:r>
           </a:p>
         </p:txBody>
@@ -13904,7 +13904,7 @@
                 </a:solidFill>
                 <a:latin typeface="Arial"/>
               </a:rPr>
-              <a:t>Mapear e analisar sistematicamente as aplicações e elaborar uma especificação técnica e pedagógica para apoiar a interpretação de evidências sobre competências.</a:t>
+              <a:t>Propor uma especificação técnica e pedagógica para apoiar a interpretação docente de evidências de desempenho em matemática, fundamentada na literatura científica.</a:t>
             </a:r>
           </a:p>
         </p:txBody>
@@ -14120,8 +14120,8 @@
         </p:nvSpPr>
         <p:spPr>
           <a:xfrm>
-            <a:off x="685800" y="1143000"/>
-            <a:ext cx="5166360" cy="868680"/>
+            <a:off x="685800" y="1325880"/>
+            <a:ext cx="5166360" cy="1645920"/>
           </a:xfrm>
           <a:prstGeom prst="rect">
             <a:avLst/>
@@ -14163,8 +14163,8 @@
         </p:nvSpPr>
         <p:spPr>
           <a:xfrm>
-            <a:off x="685800" y="1143000"/>
-            <a:ext cx="59436" cy="868680"/>
+            <a:off x="685800" y="1325880"/>
+            <a:ext cx="59436" cy="1645920"/>
           </a:xfrm>
           <a:prstGeom prst="rect">
             <a:avLst/>
@@ -14206,7 +14206,7 @@
         </p:nvSpPr>
         <p:spPr>
           <a:xfrm>
-            <a:off x="868680" y="1197864"/>
+            <a:off x="868680" y="1380744"/>
             <a:ext cx="4892040" cy="384048"/>
           </a:xfrm>
           <a:prstGeom prst="rect">
@@ -14226,7 +14226,7 @@
               </a:spcAft>
             </a:pPr>
             <a:r>
-              <a:rPr sz="1500" b="1">
+              <a:rPr sz="1900" b="1">
                 <a:solidFill>
                   <a:srgbClr val="0F0F0F"/>
                 </a:solidFill>
@@ -14245,8 +14245,8 @@
         </p:nvSpPr>
         <p:spPr>
           <a:xfrm>
-            <a:off x="868680" y="1600200"/>
-            <a:ext cx="4892040" cy="347473"/>
+            <a:off x="868680" y="1783080"/>
+            <a:ext cx="4892040" cy="1124713"/>
           </a:xfrm>
           <a:prstGeom prst="rect">
             <a:avLst/>
@@ -14265,13 +14265,13 @@
               </a:spcAft>
             </a:pPr>
             <a:r>
-              <a:rPr sz="1350" b="0">
+              <a:rPr sz="1800" b="0">
                 <a:solidFill>
                   <a:srgbClr val="232323"/>
                 </a:solidFill>
                 <a:latin typeface="Arial"/>
               </a:rPr>
-              <a:t>Revisão sistemática, relatada com apoio do PRISMA 2020, sobre estudos de 2015–2026.</a:t>
+              <a:t>Categorizar técnicas computacionais e finalidades pedagógicas na literatura mapeada.</a:t>
             </a:r>
           </a:p>
         </p:txBody>
@@ -14284,8 +14284,8 @@
         </p:nvSpPr>
         <p:spPr>
           <a:xfrm>
-            <a:off x="685800" y="2286000"/>
-            <a:ext cx="5166360" cy="868680"/>
+            <a:off x="685800" y="3337560"/>
+            <a:ext cx="5166360" cy="1645920"/>
           </a:xfrm>
           <a:prstGeom prst="rect">
             <a:avLst/>
@@ -14327,8 +14327,8 @@
         </p:nvSpPr>
         <p:spPr>
           <a:xfrm>
-            <a:off x="685800" y="2286000"/>
-            <a:ext cx="59436" cy="868680"/>
+            <a:off x="685800" y="3337560"/>
+            <a:ext cx="59436" cy="1645920"/>
           </a:xfrm>
           <a:prstGeom prst="rect">
             <a:avLst/>
@@ -14370,7 +14370,7 @@
         </p:nvSpPr>
         <p:spPr>
           <a:xfrm>
-            <a:off x="868680" y="2340864"/>
+            <a:off x="868680" y="3392424"/>
             <a:ext cx="4892040" cy="384048"/>
           </a:xfrm>
           <a:prstGeom prst="rect">
@@ -14390,7 +14390,7 @@
               </a:spcAft>
             </a:pPr>
             <a:r>
-              <a:rPr sz="1500" b="1">
+              <a:rPr sz="1900" b="1">
                 <a:solidFill>
                   <a:srgbClr val="0F0F0F"/>
                 </a:solidFill>
@@ -14409,8 +14409,8 @@
         </p:nvSpPr>
         <p:spPr>
           <a:xfrm>
-            <a:off x="868680" y="2743200"/>
-            <a:ext cx="4892040" cy="347473"/>
+            <a:off x="868680" y="3794760"/>
+            <a:ext cx="4892040" cy="1124713"/>
           </a:xfrm>
           <a:prstGeom prst="rect">
             <a:avLst/>
@@ -14429,13 +14429,13 @@
               </a:spcAft>
             </a:pPr>
             <a:r>
-              <a:rPr sz="1350" b="0">
+              <a:rPr sz="1800" b="0">
                 <a:solidFill>
                   <a:srgbClr val="232323"/>
                 </a:solidFill>
                 <a:latin typeface="Arial"/>
               </a:rPr>
-              <a:t>Identificação e categorização das abordagens computacionais.</a:t>
+              <a:t>Identificar limitações e lacunas técnicas, pedagógicas, metodológicas e éticas.</a:t>
             </a:r>
           </a:p>
         </p:txBody>
@@ -14448,8 +14448,8 @@
         </p:nvSpPr>
         <p:spPr>
           <a:xfrm>
-            <a:off x="685800" y="3429000"/>
-            <a:ext cx="5166360" cy="868680"/>
+            <a:off x="6309360" y="1325880"/>
+            <a:ext cx="5166360" cy="1645920"/>
           </a:xfrm>
           <a:prstGeom prst="rect">
             <a:avLst/>
@@ -14491,14 +14491,14 @@
         </p:nvSpPr>
         <p:spPr>
           <a:xfrm>
-            <a:off x="685800" y="3429000"/>
-            <a:ext cx="59436" cy="868680"/>
-          </a:xfrm>
-          <a:prstGeom prst="rect">
-            <a:avLst/>
-          </a:prstGeom>
-          <a:solidFill>
-            <a:srgbClr val="2563EB"/>
+            <a:off x="6309360" y="1325880"/>
+            <a:ext cx="59436" cy="1645920"/>
+          </a:xfrm>
+          <a:prstGeom prst="rect">
+            <a:avLst/>
+          </a:prstGeom>
+          <a:solidFill>
+            <a:srgbClr val="0D9488"/>
           </a:solidFill>
           <a:ln>
             <a:noFill/>
@@ -14534,7 +14534,7 @@
         </p:nvSpPr>
         <p:spPr>
           <a:xfrm>
-            <a:off x="868680" y="3483864"/>
+            <a:off x="6492240" y="1380744"/>
             <a:ext cx="4892040" cy="384048"/>
           </a:xfrm>
           <a:prstGeom prst="rect">
@@ -14554,7 +14554,7 @@
               </a:spcAft>
             </a:pPr>
             <a:r>
-              <a:rPr sz="1500" b="1">
+              <a:rPr sz="1900" b="1">
                 <a:solidFill>
                   <a:srgbClr val="0F0F0F"/>
                 </a:solidFill>
@@ -14573,8 +14573,8 @@
         </p:nvSpPr>
         <p:spPr>
           <a:xfrm>
-            <a:off x="868680" y="3886200"/>
-            <a:ext cx="4892040" cy="347473"/>
+            <a:off x="6492240" y="1783080"/>
+            <a:ext cx="4892040" cy="1124713"/>
           </a:xfrm>
           <a:prstGeom prst="rect">
             <a:avLst/>
@@ -14593,13 +14593,13 @@
               </a:spcAft>
             </a:pPr>
             <a:r>
-              <a:rPr sz="1350" b="0">
+              <a:rPr sz="1800" b="0">
                 <a:solidFill>
                   <a:srgbClr val="232323"/>
                 </a:solidFill>
                 <a:latin typeface="Arial"/>
               </a:rPr>
-              <a:t>Classificação das finalidades pedagógicas das aplicações.</a:t>
+              <a:t>Formular requisitos, critérios de dados e modelos e arquitetura de referência para o protótipo.</a:t>
             </a:r>
           </a:p>
         </p:txBody>
@@ -14612,8 +14612,8 @@
         </p:nvSpPr>
         <p:spPr>
           <a:xfrm>
-            <a:off x="685800" y="4572000"/>
-            <a:ext cx="5166360" cy="868680"/>
+            <a:off x="6309360" y="3337560"/>
+            <a:ext cx="5166360" cy="1645920"/>
           </a:xfrm>
           <a:prstGeom prst="rect">
             <a:avLst/>
@@ -14655,14 +14655,14 @@
         </p:nvSpPr>
         <p:spPr>
           <a:xfrm>
-            <a:off x="685800" y="4572000"/>
-            <a:ext cx="59436" cy="868680"/>
-          </a:xfrm>
-          <a:prstGeom prst="rect">
-            <a:avLst/>
-          </a:prstGeom>
-          <a:solidFill>
-            <a:srgbClr val="2563EB"/>
+            <a:off x="6309360" y="3337560"/>
+            <a:ext cx="59436" cy="1645920"/>
+          </a:xfrm>
+          <a:prstGeom prst="rect">
+            <a:avLst/>
+          </a:prstGeom>
+          <a:solidFill>
+            <a:srgbClr val="0D9488"/>
           </a:solidFill>
           <a:ln>
             <a:noFill/>
@@ -14698,7 +14698,7 @@
         </p:nvSpPr>
         <p:spPr>
           <a:xfrm>
-            <a:off x="868680" y="4626864"/>
+            <a:off x="6492240" y="3392424"/>
             <a:ext cx="4892040" cy="384048"/>
           </a:xfrm>
           <a:prstGeom prst="rect">
@@ -14718,7 +14718,7 @@
               </a:spcAft>
             </a:pPr>
             <a:r>
-              <a:rPr sz="1500" b="1">
+              <a:rPr sz="1900" b="1">
                 <a:solidFill>
                   <a:srgbClr val="0F0F0F"/>
                 </a:solidFill>
@@ -14737,8 +14737,8 @@
         </p:nvSpPr>
         <p:spPr>
           <a:xfrm>
-            <a:off x="868680" y="5029200"/>
-            <a:ext cx="4892040" cy="347473"/>
+            <a:off x="6492240" y="3794760"/>
+            <a:ext cx="4892040" cy="1124713"/>
           </a:xfrm>
           <a:prstGeom prst="rect">
             <a:avLst/>
@@ -14757,113 +14757,27 @@
               </a:spcAft>
             </a:pPr>
             <a:r>
-              <a:rPr sz="1350" b="0">
+              <a:rPr sz="1800" b="0">
                 <a:solidFill>
                   <a:srgbClr val="232323"/>
                 </a:solidFill>
                 <a:latin typeface="Arial"/>
               </a:rPr>
-              <a:t>Análise crítica das metodologias e limitações dos estudos.</a:t>
-            </a:r>
-          </a:p>
-        </p:txBody>
-      </p:sp>
-      <p:sp>
-        <p:nvSpPr>
-          <p:cNvPr id="19" name="Rectangle 18"/>
-          <p:cNvSpPr/>
-          <p:nvPr/>
-        </p:nvSpPr>
-        <p:spPr>
-          <a:xfrm>
-            <a:off x="6309360" y="1143000"/>
-            <a:ext cx="5166360" cy="1143000"/>
-          </a:xfrm>
-          <a:prstGeom prst="rect">
-            <a:avLst/>
-          </a:prstGeom>
-          <a:solidFill>
-            <a:srgbClr val="FFFFFF"/>
-          </a:solidFill>
-          <a:ln>
-            <a:noFill/>
-          </a:ln>
-        </p:spPr>
-        <p:style>
-          <a:lnRef idx="1">
-            <a:schemeClr val="accent1"/>
-          </a:lnRef>
-          <a:fillRef idx="3">
-            <a:schemeClr val="accent1"/>
-          </a:fillRef>
-          <a:effectRef idx="2">
-            <a:schemeClr val="accent1"/>
-          </a:effectRef>
-          <a:fontRef idx="minor">
-            <a:schemeClr val="lt1"/>
-          </a:fontRef>
-        </p:style>
-        <p:txBody>
-          <a:bodyPr rtlCol="0" anchor="ctr"/>
-          <a:lstStyle/>
-          <a:p>
-            <a:pPr algn="ctr"/>
-          </a:p>
-        </p:txBody>
-      </p:sp>
-      <p:sp>
-        <p:nvSpPr>
-          <p:cNvPr id="20" name="Rectangle 19"/>
-          <p:cNvSpPr/>
-          <p:nvPr/>
-        </p:nvSpPr>
-        <p:spPr>
-          <a:xfrm>
-            <a:off x="6309360" y="1143000"/>
-            <a:ext cx="59436" cy="1143000"/>
-          </a:xfrm>
-          <a:prstGeom prst="rect">
-            <a:avLst/>
-          </a:prstGeom>
-          <a:solidFill>
-            <a:srgbClr val="0D9488"/>
-          </a:solidFill>
-          <a:ln>
-            <a:noFill/>
-          </a:ln>
-        </p:spPr>
-        <p:style>
-          <a:lnRef idx="1">
-            <a:schemeClr val="accent1"/>
-          </a:lnRef>
-          <a:fillRef idx="3">
-            <a:schemeClr val="accent1"/>
-          </a:fillRef>
-          <a:effectRef idx="2">
-            <a:schemeClr val="accent1"/>
-          </a:effectRef>
-          <a:fontRef idx="minor">
-            <a:schemeClr val="lt1"/>
-          </a:fontRef>
-        </p:style>
-        <p:txBody>
-          <a:bodyPr rtlCol="0" anchor="ctr"/>
-          <a:lstStyle/>
-          <a:p>
-            <a:pPr algn="ctr"/>
-          </a:p>
-        </p:txBody>
-      </p:sp>
-      <p:sp>
-        <p:nvSpPr>
-          <p:cNvPr id="21" name="TextBox 20"/>
+              <a:t>Propor um protocolo para avaliação futura dos aspectos técnicos e de adequação pedagógica.</a:t>
+            </a:r>
+          </a:p>
+        </p:txBody>
+      </p:sp>
+      <p:sp>
+        <p:nvSpPr>
+          <p:cNvPr id="19" name="TextBox 18"/>
           <p:cNvSpPr txBox="1"/>
           <p:nvPr/>
         </p:nvSpPr>
         <p:spPr>
           <a:xfrm>
-            <a:off x="6492240" y="1197864"/>
-            <a:ext cx="4892040" cy="384048"/>
+            <a:off x="914400" y="5669280"/>
+            <a:ext cx="10287000" cy="594360"/>
           </a:xfrm>
           <a:prstGeom prst="rect">
             <a:avLst/>
@@ -14876,425 +14790,19 @@
           </a:bodyPr>
           <a:lstStyle/>
           <a:p>
-            <a:pPr algn="l">
+            <a:pPr algn="ctr">
               <a:spcAft>
                 <a:spcPts val="0"/>
               </a:spcAft>
             </a:pPr>
             <a:r>
-              <a:rPr sz="1500" b="1">
-                <a:solidFill>
-                  <a:srgbClr val="0F0F0F"/>
+              <a:rPr sz="1400" b="0">
+                <a:solidFill>
+                  <a:srgbClr val="64748B"/>
                 </a:solidFill>
                 <a:latin typeface="Arial"/>
               </a:rPr>
-              <a:t>OE5</a:t>
-            </a:r>
-          </a:p>
-        </p:txBody>
-      </p:sp>
-      <p:sp>
-        <p:nvSpPr>
-          <p:cNvPr id="22" name="TextBox 21"/>
-          <p:cNvSpPr txBox="1"/>
-          <p:nvPr/>
-        </p:nvSpPr>
-        <p:spPr>
-          <a:xfrm>
-            <a:off x="6492240" y="1600200"/>
-            <a:ext cx="4892040" cy="621793"/>
-          </a:xfrm>
-          <a:prstGeom prst="rect">
-            <a:avLst/>
-          </a:prstGeom>
-          <a:noFill/>
-        </p:spPr>
-        <p:txBody>
-          <a:bodyPr wrap="square" lIns="54864" rIns="54864" tIns="54864" bIns="54864" anchor="t">
-            <a:spAutoFit/>
-          </a:bodyPr>
-          <a:lstStyle/>
-          <a:p>
-            <a:pPr algn="l">
-              <a:spcAft>
-                <a:spcPts val="0"/>
-              </a:spcAft>
-            </a:pPr>
-            <a:r>
-              <a:rPr sz="1350" b="0">
-                <a:solidFill>
-                  <a:srgbClr val="232323"/>
-                </a:solidFill>
-                <a:latin typeface="Arial"/>
-              </a:rPr>
-              <a:t>Mapeamento de lacunas técnicas, pedagógicas, metodológicas e éticas.</a:t>
-            </a:r>
-          </a:p>
-        </p:txBody>
-      </p:sp>
-      <p:sp>
-        <p:nvSpPr>
-          <p:cNvPr id="23" name="Rectangle 22"/>
-          <p:cNvSpPr/>
-          <p:nvPr/>
-        </p:nvSpPr>
-        <p:spPr>
-          <a:xfrm>
-            <a:off x="6309360" y="2560320"/>
-            <a:ext cx="5166360" cy="1143000"/>
-          </a:xfrm>
-          <a:prstGeom prst="rect">
-            <a:avLst/>
-          </a:prstGeom>
-          <a:solidFill>
-            <a:srgbClr val="FFFFFF"/>
-          </a:solidFill>
-          <a:ln>
-            <a:noFill/>
-          </a:ln>
-        </p:spPr>
-        <p:style>
-          <a:lnRef idx="1">
-            <a:schemeClr val="accent1"/>
-          </a:lnRef>
-          <a:fillRef idx="3">
-            <a:schemeClr val="accent1"/>
-          </a:fillRef>
-          <a:effectRef idx="2">
-            <a:schemeClr val="accent1"/>
-          </a:effectRef>
-          <a:fontRef idx="minor">
-            <a:schemeClr val="lt1"/>
-          </a:fontRef>
-        </p:style>
-        <p:txBody>
-          <a:bodyPr rtlCol="0" anchor="ctr"/>
-          <a:lstStyle/>
-          <a:p>
-            <a:pPr algn="ctr"/>
-          </a:p>
-        </p:txBody>
-      </p:sp>
-      <p:sp>
-        <p:nvSpPr>
-          <p:cNvPr id="24" name="Rectangle 23"/>
-          <p:cNvSpPr/>
-          <p:nvPr/>
-        </p:nvSpPr>
-        <p:spPr>
-          <a:xfrm>
-            <a:off x="6309360" y="2560320"/>
-            <a:ext cx="59436" cy="1143000"/>
-          </a:xfrm>
-          <a:prstGeom prst="rect">
-            <a:avLst/>
-          </a:prstGeom>
-          <a:solidFill>
-            <a:srgbClr val="0D9488"/>
-          </a:solidFill>
-          <a:ln>
-            <a:noFill/>
-          </a:ln>
-        </p:spPr>
-        <p:style>
-          <a:lnRef idx="1">
-            <a:schemeClr val="accent1"/>
-          </a:lnRef>
-          <a:fillRef idx="3">
-            <a:schemeClr val="accent1"/>
-          </a:fillRef>
-          <a:effectRef idx="2">
-            <a:schemeClr val="accent1"/>
-          </a:effectRef>
-          <a:fontRef idx="minor">
-            <a:schemeClr val="lt1"/>
-          </a:fontRef>
-        </p:style>
-        <p:txBody>
-          <a:bodyPr rtlCol="0" anchor="ctr"/>
-          <a:lstStyle/>
-          <a:p>
-            <a:pPr algn="ctr"/>
-          </a:p>
-        </p:txBody>
-      </p:sp>
-      <p:sp>
-        <p:nvSpPr>
-          <p:cNvPr id="25" name="TextBox 24"/>
-          <p:cNvSpPr txBox="1"/>
-          <p:nvPr/>
-        </p:nvSpPr>
-        <p:spPr>
-          <a:xfrm>
-            <a:off x="6492240" y="2615184"/>
-            <a:ext cx="4892040" cy="384048"/>
-          </a:xfrm>
-          <a:prstGeom prst="rect">
-            <a:avLst/>
-          </a:prstGeom>
-          <a:noFill/>
-        </p:spPr>
-        <p:txBody>
-          <a:bodyPr wrap="square" lIns="54864" rIns="54864" tIns="54864" bIns="54864" anchor="t">
-            <a:spAutoFit/>
-          </a:bodyPr>
-          <a:lstStyle/>
-          <a:p>
-            <a:pPr algn="l">
-              <a:spcAft>
-                <a:spcPts val="0"/>
-              </a:spcAft>
-            </a:pPr>
-            <a:r>
-              <a:rPr sz="1500" b="1">
-                <a:solidFill>
-                  <a:srgbClr val="0F0F0F"/>
-                </a:solidFill>
-                <a:latin typeface="Arial"/>
-              </a:rPr>
-              <a:t>OE6</a:t>
-            </a:r>
-          </a:p>
-        </p:txBody>
-      </p:sp>
-      <p:sp>
-        <p:nvSpPr>
-          <p:cNvPr id="26" name="TextBox 25"/>
-          <p:cNvSpPr txBox="1"/>
-          <p:nvPr/>
-        </p:nvSpPr>
-        <p:spPr>
-          <a:xfrm>
-            <a:off x="6492240" y="3017520"/>
-            <a:ext cx="4892040" cy="621793"/>
-          </a:xfrm>
-          <a:prstGeom prst="rect">
-            <a:avLst/>
-          </a:prstGeom>
-          <a:noFill/>
-        </p:spPr>
-        <p:txBody>
-          <a:bodyPr wrap="square" lIns="54864" rIns="54864" tIns="54864" bIns="54864" anchor="t">
-            <a:spAutoFit/>
-          </a:bodyPr>
-          <a:lstStyle/>
-          <a:p>
-            <a:pPr algn="l">
-              <a:spcAft>
-                <a:spcPts val="0"/>
-              </a:spcAft>
-            </a:pPr>
-            <a:r>
-              <a:rPr sz="1350" b="0">
-                <a:solidFill>
-                  <a:srgbClr val="232323"/>
-                </a:solidFill>
-                <a:latin typeface="Arial"/>
-              </a:rPr>
-              <a:t>Manutenção de um pipeline automatizado e auditável para coleta, processamento e exportação.</a:t>
-            </a:r>
-          </a:p>
-        </p:txBody>
-      </p:sp>
-      <p:sp>
-        <p:nvSpPr>
-          <p:cNvPr id="27" name="Rectangle 26"/>
-          <p:cNvSpPr/>
-          <p:nvPr/>
-        </p:nvSpPr>
-        <p:spPr>
-          <a:xfrm>
-            <a:off x="6309360" y="3977639"/>
-            <a:ext cx="5166360" cy="1143000"/>
-          </a:xfrm>
-          <a:prstGeom prst="rect">
-            <a:avLst/>
-          </a:prstGeom>
-          <a:solidFill>
-            <a:srgbClr val="FFFFFF"/>
-          </a:solidFill>
-          <a:ln>
-            <a:noFill/>
-          </a:ln>
-        </p:spPr>
-        <p:style>
-          <a:lnRef idx="1">
-            <a:schemeClr val="accent1"/>
-          </a:lnRef>
-          <a:fillRef idx="3">
-            <a:schemeClr val="accent1"/>
-          </a:fillRef>
-          <a:effectRef idx="2">
-            <a:schemeClr val="accent1"/>
-          </a:effectRef>
-          <a:fontRef idx="minor">
-            <a:schemeClr val="lt1"/>
-          </a:fontRef>
-        </p:style>
-        <p:txBody>
-          <a:bodyPr rtlCol="0" anchor="ctr"/>
-          <a:lstStyle/>
-          <a:p>
-            <a:pPr algn="ctr"/>
-          </a:p>
-        </p:txBody>
-      </p:sp>
-      <p:sp>
-        <p:nvSpPr>
-          <p:cNvPr id="28" name="Rectangle 27"/>
-          <p:cNvSpPr/>
-          <p:nvPr/>
-        </p:nvSpPr>
-        <p:spPr>
-          <a:xfrm>
-            <a:off x="6309360" y="3977639"/>
-            <a:ext cx="59436" cy="1143000"/>
-          </a:xfrm>
-          <a:prstGeom prst="rect">
-            <a:avLst/>
-          </a:prstGeom>
-          <a:solidFill>
-            <a:srgbClr val="0D9488"/>
-          </a:solidFill>
-          <a:ln>
-            <a:noFill/>
-          </a:ln>
-        </p:spPr>
-        <p:style>
-          <a:lnRef idx="1">
-            <a:schemeClr val="accent1"/>
-          </a:lnRef>
-          <a:fillRef idx="3">
-            <a:schemeClr val="accent1"/>
-          </a:fillRef>
-          <a:effectRef idx="2">
-            <a:schemeClr val="accent1"/>
-          </a:effectRef>
-          <a:fontRef idx="minor">
-            <a:schemeClr val="lt1"/>
-          </a:fontRef>
-        </p:style>
-        <p:txBody>
-          <a:bodyPr rtlCol="0" anchor="ctr"/>
-          <a:lstStyle/>
-          <a:p>
-            <a:pPr algn="ctr"/>
-          </a:p>
-        </p:txBody>
-      </p:sp>
-      <p:sp>
-        <p:nvSpPr>
-          <p:cNvPr id="29" name="TextBox 28"/>
-          <p:cNvSpPr txBox="1"/>
-          <p:nvPr/>
-        </p:nvSpPr>
-        <p:spPr>
-          <a:xfrm>
-            <a:off x="6492240" y="4032503"/>
-            <a:ext cx="4892040" cy="384048"/>
-          </a:xfrm>
-          <a:prstGeom prst="rect">
-            <a:avLst/>
-          </a:prstGeom>
-          <a:noFill/>
-        </p:spPr>
-        <p:txBody>
-          <a:bodyPr wrap="square" lIns="54864" rIns="54864" tIns="54864" bIns="54864" anchor="t">
-            <a:spAutoFit/>
-          </a:bodyPr>
-          <a:lstStyle/>
-          <a:p>
-            <a:pPr algn="l">
-              <a:spcAft>
-                <a:spcPts val="0"/>
-              </a:spcAft>
-            </a:pPr>
-            <a:r>
-              <a:rPr sz="1500" b="1">
-                <a:solidFill>
-                  <a:srgbClr val="0F0F0F"/>
-                </a:solidFill>
-                <a:latin typeface="Arial"/>
-              </a:rPr>
-              <a:t>OE7</a:t>
-            </a:r>
-          </a:p>
-        </p:txBody>
-      </p:sp>
-      <p:sp>
-        <p:nvSpPr>
-          <p:cNvPr id="30" name="TextBox 29"/>
-          <p:cNvSpPr txBox="1"/>
-          <p:nvPr/>
-        </p:nvSpPr>
-        <p:spPr>
-          <a:xfrm>
-            <a:off x="6492240" y="4434839"/>
-            <a:ext cx="4892040" cy="621793"/>
-          </a:xfrm>
-          <a:prstGeom prst="rect">
-            <a:avLst/>
-          </a:prstGeom>
-          <a:noFill/>
-        </p:spPr>
-        <p:txBody>
-          <a:bodyPr wrap="square" lIns="54864" rIns="54864" tIns="54864" bIns="54864" anchor="t">
-            <a:spAutoFit/>
-          </a:bodyPr>
-          <a:lstStyle/>
-          <a:p>
-            <a:pPr algn="l">
-              <a:spcAft>
-                <a:spcPts val="0"/>
-              </a:spcAft>
-            </a:pPr>
-            <a:r>
-              <a:rPr sz="1350" b="0">
-                <a:solidFill>
-                  <a:srgbClr val="232323"/>
-                </a:solidFill>
-                <a:latin typeface="Arial"/>
-              </a:rPr>
-              <a:t>Derivação de requisitos, critérios de dados e modelos, protocolo de avaliação e arquitetura de referência.</a:t>
-            </a:r>
-          </a:p>
-        </p:txBody>
-      </p:sp>
-      <p:sp>
-        <p:nvSpPr>
-          <p:cNvPr id="31" name="TextBox 30"/>
-          <p:cNvSpPr txBox="1"/>
-          <p:nvPr/>
-        </p:nvSpPr>
-        <p:spPr>
-          <a:xfrm>
-            <a:off x="914400" y="5897880"/>
-            <a:ext cx="10287000" cy="384048"/>
-          </a:xfrm>
-          <a:prstGeom prst="rect">
-            <a:avLst/>
-          </a:prstGeom>
-          <a:noFill/>
-        </p:spPr>
-        <p:txBody>
-          <a:bodyPr wrap="square" lIns="54864" rIns="54864" tIns="54864" bIns="54864" anchor="t">
-            <a:spAutoFit/>
-          </a:bodyPr>
-          <a:lstStyle/>
-          <a:p>
-            <a:pPr algn="ctr">
-              <a:spcAft>
-                <a:spcPts val="0"/>
-              </a:spcAft>
-            </a:pPr>
-            <a:r>
-              <a:rPr sz="1400" b="0">
-                <a:solidFill>
-                  <a:srgbClr val="64748B"/>
-                </a:solidFill>
-                <a:latin typeface="Arial"/>
-              </a:rPr>
-              <a:t>A apresentação distingue objetivos executados de atividades que permanecem fora do escopo, como implementação funcional e validação com participantes.</a:t>
+              <a:t>Revisão, MMAT preliminar e pipeline são meios metodológicos. Propor o protocolo não equivale a executá-lo nem comprova eficácia pedagógica.</a:t>
             </a:r>
           </a:p>
         </p:txBody>
@@ -15892,7 +15400,7 @@
                 </a:solidFill>
                 <a:latin typeface="Arial"/>
               </a:rPr>
-              <a:t>Mobilização integrada de conhecimentos, procedimentos, estratégias e atitudes.</a:t>
+              <a:t>Mobilização de conhecimentos, habilidades, atitudes e valores para resolver demandas.</a:t>
             </a:r>
           </a:p>
         </p:txBody>
@@ -16056,7 +15564,7 @@
                 </a:solidFill>
                 <a:latin typeface="Arial"/>
               </a:rPr>
-              <a:t>Transformação construída ao longo do tempo, com compreensão, autonomia e transferência.</a:t>
+              <a:t>Neste TCC: mudanças no que o estudante sabe e consegue fazer ao longo do tempo.</a:t>
             </a:r>
           </a:p>
         </p:txBody>
@@ -18397,8 +17905,8 @@
         </p:blipFill>
         <p:spPr>
           <a:xfrm>
-            <a:off x="2359571" y="960120"/>
-            <a:ext cx="7488097" cy="5212080"/>
+            <a:off x="1470660" y="960120"/>
+            <a:ext cx="9265920" cy="5212080"/>
           </a:xfrm>
           <a:prstGeom prst="rect">
             <a:avLst/>
@@ -18525,8 +18033,8 @@
         </p:blipFill>
         <p:spPr>
           <a:xfrm>
-            <a:off x="640080" y="1649878"/>
-            <a:ext cx="5623560" cy="3741123"/>
+            <a:off x="640080" y="1649086"/>
+            <a:ext cx="5623560" cy="3742707"/>
           </a:xfrm>
           <a:prstGeom prst="rect">
             <a:avLst/>

--- a/results/tcc/presentation/ensino_personalizado_de_matematica_tcc.pptx
+++ b/results/tcc/presentation/ensino_personalizado_de_matematica_tcc.pptx
@@ -6739,8 +6739,8 @@
         </p:blipFill>
         <p:spPr>
           <a:xfrm>
-            <a:off x="6213560" y="1143000"/>
-            <a:ext cx="5403680" cy="2468880"/>
+            <a:off x="7187460" y="1143000"/>
+            <a:ext cx="3455879" cy="2468880"/>
           </a:xfrm>
           <a:prstGeom prst="rect">
             <a:avLst/>

--- a/results/tcc/presentation/ensino_personalizado_de_matematica_tcc.pptx
+++ b/results/tcc/presentation/ensino_personalizado_de_matematica_tcc.pptx
@@ -13740,7 +13740,7 @@
                 </a:solidFill>
                 <a:latin typeface="Arial"/>
               </a:rPr>
-              <a:t>Como estruturar uma especificação técnica e pedagógica para apoiar a interpretação docente de evidências de desempenho em matemática, com base na literatura e nos limites das inferências sobre competências e aprendizagem?</a:t>
+              <a:t>Como estruturar uma especificação técnica e pedagógica de protótipo para apoiar a interpretação docente da aprendizagem matemática a partir das evidências e técnicas computacionais identificadas na literatura?</a:t>
             </a:r>
           </a:p>
         </p:txBody>
@@ -13904,7 +13904,7 @@
                 </a:solidFill>
                 <a:latin typeface="Arial"/>
               </a:rPr>
-              <a:t>Propor uma especificação técnica e pedagógica para apoiar a interpretação docente de evidências de desempenho em matemática, fundamentada na literatura científica.</a:t>
+              <a:t>Propor uma especificação técnica e pedagógica de protótipo para apoiar a interpretação docente da aprendizagem matemática, fundamentada no mapeamento e na análise da literatura científica.</a:t>
             </a:r>
           </a:p>
         </p:txBody>

--- a/results/tcc/presentation/ensino_personalizado_de_matematica_tcc.pptx
+++ b/results/tcc/presentation/ensino_personalizado_de_matematica_tcc.pptx
@@ -8587,7 +8587,7 @@
                 </a:solidFill>
                 <a:latin typeface="Arial"/>
               </a:rPr>
-              <a:t>Apreciação preliminar por um único revisor: nove registros com texto primário revisado e oito com base em resumo/metadados.</a:t>
+              <a:t>Apreciação preliminar por um revisor: 12 textos primários consultados (9 arquivados e 3 externos) e 5 avaliações com resumo/metadados.</a:t>
             </a:r>
           </a:p>
         </p:txBody>
@@ -17452,7 +17452,7 @@
                 </a:solidFill>
                 <a:latin typeface="Arial"/>
               </a:rPr>
-              <a:t>na elegibilidade</a:t>
+              <a:t>submetidos à priorização</a:t>
             </a:r>
           </a:p>
         </p:txBody>
@@ -17616,7 +17616,7 @@
                 </a:solidFill>
                 <a:latin typeface="Arial"/>
               </a:rPr>
-              <a:t>excluídos na elegibilidade</a:t>
+              <a:t>excluídos nessa etapa</a:t>
             </a:r>
           </a:p>
         </p:txBody>
@@ -17793,8 +17793,8 @@
         </p:nvSpPr>
         <p:spPr>
           <a:xfrm>
-            <a:off x="1005840" y="5669280"/>
-            <a:ext cx="10058400" cy="320040"/>
+            <a:off x="777240" y="5623560"/>
+            <a:ext cx="10607040" cy="411480"/>
           </a:xfrm>
           <a:prstGeom prst="rect">
             <a:avLst/>
@@ -17813,13 +17813,13 @@
               </a:spcAft>
             </a:pPr>
             <a:r>
-              <a:rPr sz="1400" b="0">
+              <a:rPr sz="1150" b="0">
                 <a:solidFill>
                   <a:srgbClr val="64748B"/>
                 </a:solidFill>
                 <a:latin typeface="Arial"/>
               </a:rPr>
-              <a:t>A remoção determinística por DOI/URL precede a triagem. Igualdade de título permaneceu como candidato à auditoria semântica.</a:t>
+              <a:t>A priorização dos 2.486 registros usa metadados/resumos e não equivale à elegibilidade em texto completo; títulos repetidos seguem para auditoria semântica.</a:t>
             </a:r>
           </a:p>
         </p:txBody>
@@ -17884,7 +17884,7 @@
                 </a:solidFill>
                 <a:latin typeface="Arial"/>
               </a:rPr>
-              <a:t>Fluxo PRISMA do snapshot</a:t>
+              <a:t>Fluxo operacional do processo de seleção</a:t>
             </a:r>
           </a:p>
         </p:txBody>
@@ -17947,7 +17947,7 @@
                 </a:solidFill>
                 <a:latin typeface="Arial"/>
               </a:rPr>
-              <a:t>Figura versionada e sincronizada com os artefatos públicos do pipeline.</a:t>
+              <a:t>Representação operacional própria; não reproduz todas as etapas do diagrama PRISMA 2020.</a:t>
             </a:r>
           </a:p>
         </p:txBody>

--- a/results/tcc/presentation/ensino_personalizado_de_matematica_tcc.pptx
+++ b/results/tcc/presentation/ensino_personalizado_de_matematica_tcc.pptx
@@ -7174,7 +7174,7 @@
                 </a:solidFill>
                 <a:latin typeface="Arial"/>
               </a:rPr>
-              <a:t>População retida e síntese empírica</a:t>
+              <a:t>Conjunto retido e síntese empírica</a:t>
             </a:r>
           </a:p>
         </p:txBody>
@@ -9615,7 +9615,7 @@
                 </a:solidFill>
                 <a:latin typeface="Arial"/>
               </a:rPr>
-              <a:t>Lacunas documentadas</a:t>
+              <a:t>Limitações localizadas nos estudos consultados</a:t>
             </a:r>
           </a:p>
         </p:txBody>
@@ -9628,8 +9628,8 @@
         </p:nvSpPr>
         <p:spPr>
           <a:xfrm>
-            <a:off x="685800" y="1143000"/>
-            <a:ext cx="3337560" cy="1417320"/>
+            <a:off x="685800" y="1097280"/>
+            <a:ext cx="5257800" cy="1737360"/>
           </a:xfrm>
           <a:prstGeom prst="rect">
             <a:avLst/>
@@ -9671,8 +9671,8 @@
         </p:nvSpPr>
         <p:spPr>
           <a:xfrm>
-            <a:off x="685800" y="1143000"/>
-            <a:ext cx="59436" cy="1417320"/>
+            <a:off x="685800" y="1097280"/>
+            <a:ext cx="59436" cy="1737360"/>
           </a:xfrm>
           <a:prstGeom prst="rect">
             <a:avLst/>
@@ -9714,8 +9714,8 @@
         </p:nvSpPr>
         <p:spPr>
           <a:xfrm>
-            <a:off x="868680" y="1197864"/>
-            <a:ext cx="3063240" cy="384048"/>
+            <a:off x="868680" y="1152144"/>
+            <a:ext cx="4983480" cy="384048"/>
           </a:xfrm>
           <a:prstGeom prst="rect">
             <a:avLst/>
@@ -9734,13 +9734,13 @@
               </a:spcAft>
             </a:pPr>
             <a:r>
-              <a:rPr sz="1500" b="1">
+              <a:rPr sz="1600" b="1">
                 <a:solidFill>
                   <a:srgbClr val="0F0F0F"/>
                 </a:solidFill>
                 <a:latin typeface="Arial"/>
               </a:rPr>
-              <a:t>Explicabilidade</a:t>
+              <a:t>He et al. (2025)</a:t>
             </a:r>
           </a:p>
         </p:txBody>
@@ -9753,8 +9753,8 @@
         </p:nvSpPr>
         <p:spPr>
           <a:xfrm>
-            <a:off x="868680" y="1600200"/>
-            <a:ext cx="3063240" cy="896113"/>
+            <a:off x="868680" y="1554480"/>
+            <a:ext cx="4983480" cy="1216153"/>
           </a:xfrm>
           <a:prstGeom prst="rect">
             <a:avLst/>
@@ -9773,13 +9773,13 @@
               </a:spcAft>
             </a:pPr>
             <a:r>
-              <a:rPr sz="1350" b="0">
+              <a:rPr sz="1300" b="0">
                 <a:solidFill>
                   <a:srgbClr val="232323"/>
                 </a:solidFill>
                 <a:latin typeface="Arial"/>
               </a:rPr>
-              <a:t>Pouca clareza sobre como as saídas chegam à interpretação pedagógica.</a:t>
+              <a:t>Oito turmas de 45 estudantes são descritas, mas a amostra declarada é n=90; docentes também se distribuem de modo desigual entre condições (pp. 1, 16, 31–35). Isso exige cautela com denominadores e possível confundimento.</a:t>
             </a:r>
           </a:p>
         </p:txBody>
@@ -9792,8 +9792,8 @@
         </p:nvSpPr>
         <p:spPr>
           <a:xfrm>
-            <a:off x="4434840" y="1143000"/>
-            <a:ext cx="3337560" cy="1417320"/>
+            <a:off x="6217920" y="1097280"/>
+            <a:ext cx="5257800" cy="1737360"/>
           </a:xfrm>
           <a:prstGeom prst="rect">
             <a:avLst/>
@@ -9835,8 +9835,8 @@
         </p:nvSpPr>
         <p:spPr>
           <a:xfrm>
-            <a:off x="4434840" y="1143000"/>
-            <a:ext cx="59436" cy="1417320"/>
+            <a:off x="6217920" y="1097280"/>
+            <a:ext cx="59436" cy="1737360"/>
           </a:xfrm>
           <a:prstGeom prst="rect">
             <a:avLst/>
@@ -9878,8 +9878,8 @@
         </p:nvSpPr>
         <p:spPr>
           <a:xfrm>
-            <a:off x="4617720" y="1197864"/>
-            <a:ext cx="3063240" cy="384048"/>
+            <a:off x="6400800" y="1152144"/>
+            <a:ext cx="4983480" cy="384048"/>
           </a:xfrm>
           <a:prstGeom prst="rect">
             <a:avLst/>
@@ -9898,13 +9898,13 @@
               </a:spcAft>
             </a:pPr>
             <a:r>
-              <a:rPr sz="1500" b="1">
+              <a:rPr sz="1600" b="1">
                 <a:solidFill>
                   <a:srgbClr val="0F0F0F"/>
                 </a:solidFill>
                 <a:latin typeface="Arial"/>
               </a:rPr>
-              <a:t>Currículo</a:t>
+              <a:t>Villegas-Ch et al. (2025)</a:t>
             </a:r>
           </a:p>
         </p:txBody>
@@ -9917,8 +9917,8 @@
         </p:nvSpPr>
         <p:spPr>
           <a:xfrm>
-            <a:off x="4617720" y="1600200"/>
-            <a:ext cx="3063240" cy="896113"/>
+            <a:off x="6400800" y="1554480"/>
+            <a:ext cx="4983480" cy="1216153"/>
           </a:xfrm>
           <a:prstGeom prst="rect">
             <a:avLst/>
@@ -9937,13 +9937,13 @@
               </a:spcAft>
             </a:pPr>
             <a:r>
-              <a:rPr sz="1350" b="0">
+              <a:rPr sz="1300" b="0">
                 <a:solidFill>
                   <a:srgbClr val="232323"/>
                 </a:solidFill>
                 <a:latin typeface="Arial"/>
               </a:rPr>
-              <a:t>Alinhamento explícito com referenciais curriculares aparece de forma limitada.</a:t>
+              <a:t>Os métodos descrevem seis semanas, mas os resultados chegam à oitava, sem conciliação nos trechos consultados (pp. 14, 22). Não se deve impor duração única à síntese.</a:t>
             </a:r>
           </a:p>
         </p:txBody>
@@ -9956,8 +9956,8 @@
         </p:nvSpPr>
         <p:spPr>
           <a:xfrm>
-            <a:off x="8183879" y="1143000"/>
-            <a:ext cx="3337560" cy="1417320"/>
+            <a:off x="685800" y="3063239"/>
+            <a:ext cx="5257800" cy="1737360"/>
           </a:xfrm>
           <a:prstGeom prst="rect">
             <a:avLst/>
@@ -9999,8 +9999,8 @@
         </p:nvSpPr>
         <p:spPr>
           <a:xfrm>
-            <a:off x="8183879" y="1143000"/>
-            <a:ext cx="59436" cy="1417320"/>
+            <a:off x="685800" y="3063239"/>
+            <a:ext cx="59436" cy="1737360"/>
           </a:xfrm>
           <a:prstGeom prst="rect">
             <a:avLst/>
@@ -10042,8 +10042,8 @@
         </p:nvSpPr>
         <p:spPr>
           <a:xfrm>
-            <a:off x="8366759" y="1197864"/>
-            <a:ext cx="3063240" cy="384048"/>
+            <a:off x="868680" y="3118103"/>
+            <a:ext cx="4983480" cy="384048"/>
           </a:xfrm>
           <a:prstGeom prst="rect">
             <a:avLst/>
@@ -10062,13 +10062,13 @@
               </a:spcAft>
             </a:pPr>
             <a:r>
-              <a:rPr sz="1500" b="1">
+              <a:rPr sz="1600" b="1">
                 <a:solidFill>
                   <a:srgbClr val="0F0F0F"/>
                 </a:solidFill>
                 <a:latin typeface="Arial"/>
               </a:rPr>
-              <a:t>Participação docente</a:t>
+              <a:t>Nyantah et al. (2025)</a:t>
             </a:r>
           </a:p>
         </p:txBody>
@@ -10081,8 +10081,8 @@
         </p:nvSpPr>
         <p:spPr>
           <a:xfrm>
-            <a:off x="8366759" y="1600200"/>
-            <a:ext cx="3063240" cy="896113"/>
+            <a:off x="868680" y="3520439"/>
+            <a:ext cx="4983480" cy="1216153"/>
           </a:xfrm>
           <a:prstGeom prst="rect">
             <a:avLst/>
@@ -10101,13 +10101,13 @@
               </a:spcAft>
             </a:pPr>
             <a:r>
-              <a:rPr sz="1350" b="0">
+              <a:rPr sz="1300" b="0">
                 <a:solidFill>
                   <a:srgbClr val="232323"/>
                 </a:solidFill>
                 <a:latin typeface="Arial"/>
               </a:rPr>
-              <a:t>Decisões de projeto nem sempre incorporam o professor como intérprete.</a:t>
+              <a:t>A alocação é descrita de modo incompatível; há diferença no pré-teste e a intervenção combina animação e jigsaw (pp. 101–105). O resultado não deve ser atribuído à animação isoladamente.</a:t>
             </a:r>
           </a:p>
         </p:txBody>
@@ -10120,8 +10120,8 @@
         </p:nvSpPr>
         <p:spPr>
           <a:xfrm>
-            <a:off x="685800" y="2971800"/>
-            <a:ext cx="3337560" cy="1417320"/>
+            <a:off x="6217920" y="3063239"/>
+            <a:ext cx="5257800" cy="1737360"/>
           </a:xfrm>
           <a:prstGeom prst="rect">
             <a:avLst/>
@@ -10163,8 +10163,8 @@
         </p:nvSpPr>
         <p:spPr>
           <a:xfrm>
-            <a:off x="685800" y="2971800"/>
-            <a:ext cx="59436" cy="1417320"/>
+            <a:off x="6217920" y="3063239"/>
+            <a:ext cx="59436" cy="1737360"/>
           </a:xfrm>
           <a:prstGeom prst="rect">
             <a:avLst/>
@@ -10206,8 +10206,8 @@
         </p:nvSpPr>
         <p:spPr>
           <a:xfrm>
-            <a:off x="868680" y="3026664"/>
-            <a:ext cx="3063240" cy="384048"/>
+            <a:off x="6400800" y="3118103"/>
+            <a:ext cx="4983480" cy="384048"/>
           </a:xfrm>
           <a:prstGeom prst="rect">
             <a:avLst/>
@@ -10226,13 +10226,13 @@
               </a:spcAft>
             </a:pPr>
             <a:r>
-              <a:rPr sz="1500" b="1">
+              <a:rPr sz="1600" b="1">
                 <a:solidFill>
                   <a:srgbClr val="0F0F0F"/>
                 </a:solidFill>
                 <a:latin typeface="Arial"/>
               </a:rPr>
-              <a:t>Equidade</a:t>
+              <a:t>Echeveria et al. (2025)</a:t>
             </a:r>
           </a:p>
         </p:txBody>
@@ -10245,8 +10245,8 @@
         </p:nvSpPr>
         <p:spPr>
           <a:xfrm>
-            <a:off x="868680" y="3429000"/>
-            <a:ext cx="3063240" cy="896113"/>
+            <a:off x="6400800" y="3520439"/>
+            <a:ext cx="4983480" cy="1216153"/>
           </a:xfrm>
           <a:prstGeom prst="rect">
             <a:avLst/>
@@ -10265,113 +10265,27 @@
               </a:spcAft>
             </a:pPr>
             <a:r>
-              <a:rPr sz="1350" b="0">
+              <a:rPr sz="1300" b="0">
                 <a:solidFill>
                   <a:srgbClr val="232323"/>
                 </a:solidFill>
                 <a:latin typeface="Arial"/>
               </a:rPr>
-              <a:t>Análises de possíveis vieses e diferenças entre grupos são escassas.</a:t>
-            </a:r>
-          </a:p>
-        </p:txBody>
-      </p:sp>
-      <p:sp>
-        <p:nvSpPr>
-          <p:cNvPr id="19" name="Rectangle 18"/>
-          <p:cNvSpPr/>
-          <p:nvPr/>
-        </p:nvSpPr>
-        <p:spPr>
-          <a:xfrm>
-            <a:off x="4434840" y="2971800"/>
-            <a:ext cx="3337560" cy="1417320"/>
-          </a:xfrm>
-          <a:prstGeom prst="rect">
-            <a:avLst/>
-          </a:prstGeom>
-          <a:solidFill>
-            <a:srgbClr val="FFFFFF"/>
-          </a:solidFill>
-          <a:ln>
-            <a:noFill/>
-          </a:ln>
-        </p:spPr>
-        <p:style>
-          <a:lnRef idx="1">
-            <a:schemeClr val="accent1"/>
-          </a:lnRef>
-          <a:fillRef idx="3">
-            <a:schemeClr val="accent1"/>
-          </a:fillRef>
-          <a:effectRef idx="2">
-            <a:schemeClr val="accent1"/>
-          </a:effectRef>
-          <a:fontRef idx="minor">
-            <a:schemeClr val="lt1"/>
-          </a:fontRef>
-        </p:style>
-        <p:txBody>
-          <a:bodyPr rtlCol="0" anchor="ctr"/>
-          <a:lstStyle/>
-          <a:p>
-            <a:pPr algn="ctr"/>
-          </a:p>
-        </p:txBody>
-      </p:sp>
-      <p:sp>
-        <p:nvSpPr>
-          <p:cNvPr id="20" name="Rectangle 19"/>
-          <p:cNvSpPr/>
-          <p:nvPr/>
-        </p:nvSpPr>
-        <p:spPr>
-          <a:xfrm>
-            <a:off x="4434840" y="2971800"/>
-            <a:ext cx="59436" cy="1417320"/>
-          </a:xfrm>
-          <a:prstGeom prst="rect">
-            <a:avLst/>
-          </a:prstGeom>
-          <a:solidFill>
-            <a:srgbClr val="EA580C"/>
-          </a:solidFill>
-          <a:ln>
-            <a:noFill/>
-          </a:ln>
-        </p:spPr>
-        <p:style>
-          <a:lnRef idx="1">
-            <a:schemeClr val="accent1"/>
-          </a:lnRef>
-          <a:fillRef idx="3">
-            <a:schemeClr val="accent1"/>
-          </a:fillRef>
-          <a:effectRef idx="2">
-            <a:schemeClr val="accent1"/>
-          </a:effectRef>
-          <a:fontRef idx="minor">
-            <a:schemeClr val="lt1"/>
-          </a:fontRef>
-        </p:style>
-        <p:txBody>
-          <a:bodyPr rtlCol="0" anchor="ctr"/>
-          <a:lstStyle/>
-          <a:p>
-            <a:pPr algn="ctr"/>
-          </a:p>
-        </p:txBody>
-      </p:sp>
-      <p:sp>
-        <p:nvSpPr>
-          <p:cNvPr id="21" name="TextBox 20"/>
+              <a:t>Oito itens usados para formar categorias também aparecem entre os preditores selecionados (pp. 66, 69–70). A classificação não estabelece diagnóstico independente.</a:t>
+            </a:r>
+          </a:p>
+        </p:txBody>
+      </p:sp>
+      <p:sp>
+        <p:nvSpPr>
+          <p:cNvPr id="19" name="TextBox 18"/>
           <p:cNvSpPr txBox="1"/>
           <p:nvPr/>
         </p:nvSpPr>
         <p:spPr>
           <a:xfrm>
-            <a:off x="4617720" y="3026664"/>
-            <a:ext cx="3063240" cy="384048"/>
+            <a:off x="822960" y="5074920"/>
+            <a:ext cx="10561320" cy="640080"/>
           </a:xfrm>
           <a:prstGeom prst="rect">
             <a:avLst/>
@@ -10379,266 +10293,24 @@
           <a:noFill/>
         </p:spPr>
         <p:txBody>
-          <a:bodyPr wrap="square" lIns="54864" rIns="54864" tIns="54864" bIns="54864" anchor="t">
+          <a:bodyPr wrap="square" lIns="54864" rIns="54864" tIns="54864" bIns="54864" anchor="ctr">
             <a:spAutoFit/>
           </a:bodyPr>
           <a:lstStyle/>
           <a:p>
-            <a:pPr algn="l">
+            <a:pPr algn="ctr">
               <a:spcAft>
                 <a:spcPts val="0"/>
               </a:spcAft>
             </a:pPr>
             <a:r>
-              <a:rPr sz="1500" b="1">
-                <a:solidFill>
-                  <a:srgbClr val="0F0F0F"/>
+              <a:rPr sz="1300" b="0">
+                <a:solidFill>
+                  <a:srgbClr val="334155"/>
                 </a:solidFill>
                 <a:latin typeface="Arial"/>
               </a:rPr>
-              <a:t>Reprodutibilidade</a:t>
-            </a:r>
-          </a:p>
-        </p:txBody>
-      </p:sp>
-      <p:sp>
-        <p:nvSpPr>
-          <p:cNvPr id="22" name="TextBox 21"/>
-          <p:cNvSpPr txBox="1"/>
-          <p:nvPr/>
-        </p:nvSpPr>
-        <p:spPr>
-          <a:xfrm>
-            <a:off x="4617720" y="3429000"/>
-            <a:ext cx="3063240" cy="896113"/>
-          </a:xfrm>
-          <a:prstGeom prst="rect">
-            <a:avLst/>
-          </a:prstGeom>
-          <a:noFill/>
-        </p:spPr>
-        <p:txBody>
-          <a:bodyPr wrap="square" lIns="54864" rIns="54864" tIns="54864" bIns="54864" anchor="t">
-            <a:spAutoFit/>
-          </a:bodyPr>
-          <a:lstStyle/>
-          <a:p>
-            <a:pPr algn="l">
-              <a:spcAft>
-                <a:spcPts val="0"/>
-              </a:spcAft>
-            </a:pPr>
-            <a:r>
-              <a:rPr sz="1350" b="0">
-                <a:solidFill>
-                  <a:srgbClr val="232323"/>
-                </a:solidFill>
-                <a:latin typeface="Arial"/>
-              </a:rPr>
-              <a:t>Dados, códigos e detalhes de preparação nem sempre estão disponíveis.</a:t>
-            </a:r>
-          </a:p>
-        </p:txBody>
-      </p:sp>
-      <p:sp>
-        <p:nvSpPr>
-          <p:cNvPr id="23" name="Rectangle 22"/>
-          <p:cNvSpPr/>
-          <p:nvPr/>
-        </p:nvSpPr>
-        <p:spPr>
-          <a:xfrm>
-            <a:off x="8183879" y="2971800"/>
-            <a:ext cx="3337560" cy="1417320"/>
-          </a:xfrm>
-          <a:prstGeom prst="rect">
-            <a:avLst/>
-          </a:prstGeom>
-          <a:solidFill>
-            <a:srgbClr val="FFFFFF"/>
-          </a:solidFill>
-          <a:ln>
-            <a:noFill/>
-          </a:ln>
-        </p:spPr>
-        <p:style>
-          <a:lnRef idx="1">
-            <a:schemeClr val="accent1"/>
-          </a:lnRef>
-          <a:fillRef idx="3">
-            <a:schemeClr val="accent1"/>
-          </a:fillRef>
-          <a:effectRef idx="2">
-            <a:schemeClr val="accent1"/>
-          </a:effectRef>
-          <a:fontRef idx="minor">
-            <a:schemeClr val="lt1"/>
-          </a:fontRef>
-        </p:style>
-        <p:txBody>
-          <a:bodyPr rtlCol="0" anchor="ctr"/>
-          <a:lstStyle/>
-          <a:p>
-            <a:pPr algn="ctr"/>
-          </a:p>
-        </p:txBody>
-      </p:sp>
-      <p:sp>
-        <p:nvSpPr>
-          <p:cNvPr id="24" name="Rectangle 23"/>
-          <p:cNvSpPr/>
-          <p:nvPr/>
-        </p:nvSpPr>
-        <p:spPr>
-          <a:xfrm>
-            <a:off x="8183879" y="2971800"/>
-            <a:ext cx="59436" cy="1417320"/>
-          </a:xfrm>
-          <a:prstGeom prst="rect">
-            <a:avLst/>
-          </a:prstGeom>
-          <a:solidFill>
-            <a:srgbClr val="4F46E5"/>
-          </a:solidFill>
-          <a:ln>
-            <a:noFill/>
-          </a:ln>
-        </p:spPr>
-        <p:style>
-          <a:lnRef idx="1">
-            <a:schemeClr val="accent1"/>
-          </a:lnRef>
-          <a:fillRef idx="3">
-            <a:schemeClr val="accent1"/>
-          </a:fillRef>
-          <a:effectRef idx="2">
-            <a:schemeClr val="accent1"/>
-          </a:effectRef>
-          <a:fontRef idx="minor">
-            <a:schemeClr val="lt1"/>
-          </a:fontRef>
-        </p:style>
-        <p:txBody>
-          <a:bodyPr rtlCol="0" anchor="ctr"/>
-          <a:lstStyle/>
-          <a:p>
-            <a:pPr algn="ctr"/>
-          </a:p>
-        </p:txBody>
-      </p:sp>
-      <p:sp>
-        <p:nvSpPr>
-          <p:cNvPr id="25" name="TextBox 24"/>
-          <p:cNvSpPr txBox="1"/>
-          <p:nvPr/>
-        </p:nvSpPr>
-        <p:spPr>
-          <a:xfrm>
-            <a:off x="8366759" y="3026664"/>
-            <a:ext cx="3063240" cy="384048"/>
-          </a:xfrm>
-          <a:prstGeom prst="rect">
-            <a:avLst/>
-          </a:prstGeom>
-          <a:noFill/>
-        </p:spPr>
-        <p:txBody>
-          <a:bodyPr wrap="square" lIns="54864" rIns="54864" tIns="54864" bIns="54864" anchor="t">
-            <a:spAutoFit/>
-          </a:bodyPr>
-          <a:lstStyle/>
-          <a:p>
-            <a:pPr algn="l">
-              <a:spcAft>
-                <a:spcPts val="0"/>
-              </a:spcAft>
-            </a:pPr>
-            <a:r>
-              <a:rPr sz="1500" b="1">
-                <a:solidFill>
-                  <a:srgbClr val="0F0F0F"/>
-                </a:solidFill>
-                <a:latin typeface="Arial"/>
-              </a:rPr>
-              <a:t>Contexto</a:t>
-            </a:r>
-          </a:p>
-        </p:txBody>
-      </p:sp>
-      <p:sp>
-        <p:nvSpPr>
-          <p:cNvPr id="26" name="TextBox 25"/>
-          <p:cNvSpPr txBox="1"/>
-          <p:nvPr/>
-        </p:nvSpPr>
-        <p:spPr>
-          <a:xfrm>
-            <a:off x="8366759" y="3429000"/>
-            <a:ext cx="3063240" cy="896113"/>
-          </a:xfrm>
-          <a:prstGeom prst="rect">
-            <a:avLst/>
-          </a:prstGeom>
-          <a:noFill/>
-        </p:spPr>
-        <p:txBody>
-          <a:bodyPr wrap="square" lIns="54864" rIns="54864" tIns="54864" bIns="54864" anchor="t">
-            <a:spAutoFit/>
-          </a:bodyPr>
-          <a:lstStyle/>
-          <a:p>
-            <a:pPr algn="l">
-              <a:spcAft>
-                <a:spcPts val="0"/>
-              </a:spcAft>
-            </a:pPr>
-            <a:r>
-              <a:rPr sz="1350" b="0">
-                <a:solidFill>
-                  <a:srgbClr val="232323"/>
-                </a:solidFill>
-                <a:latin typeface="Arial"/>
-              </a:rPr>
-              <a:t>Validações permanecem restritas a populações e cenários específicos.</a:t>
-            </a:r>
-          </a:p>
-        </p:txBody>
-      </p:sp>
-      <p:sp>
-        <p:nvSpPr>
-          <p:cNvPr id="27" name="TextBox 26"/>
-          <p:cNvSpPr txBox="1"/>
-          <p:nvPr/>
-        </p:nvSpPr>
-        <p:spPr>
-          <a:xfrm>
-            <a:off x="914400" y="5806440"/>
-            <a:ext cx="10241280" cy="292608"/>
-          </a:xfrm>
-          <a:prstGeom prst="rect">
-            <a:avLst/>
-          </a:prstGeom>
-          <a:noFill/>
-        </p:spPr>
-        <p:txBody>
-          <a:bodyPr wrap="square" lIns="54864" rIns="54864" tIns="54864" bIns="54864" anchor="t">
-            <a:spAutoFit/>
-          </a:bodyPr>
-          <a:lstStyle/>
-          <a:p>
-            <a:pPr algn="ctr">
-              <a:spcAft>
-                <a:spcPts val="0"/>
-              </a:spcAft>
-            </a:pPr>
-            <a:r>
-              <a:rPr sz="1400" b="0">
-                <a:solidFill>
-                  <a:srgbClr val="64748B"/>
-                </a:solidFill>
-                <a:latin typeface="Arial"/>
-              </a:rPr>
-              <a:t>Essas lacunas foram tratadas como requisitos de projeto — não como prova de que uma solução futura será eficaz.</a:t>
+              <a:t>Exemplos localizados, não estimam a frequência da literatura. Cobertura: 12 de 17 textos primários; os demais foram apreciados por resumo/metadados. MMAT preliminar, por revisor único.</a:t>
             </a:r>
           </a:p>
         </p:txBody>
@@ -16592,7 +16264,7 @@
                 </a:solidFill>
                 <a:latin typeface="Arial"/>
               </a:rPr>
-              <a:t>Do registro bruto à população retida</a:t>
+              <a:t>Do registro bruto ao conjunto retido provisoriamente</a:t>
             </a:r>
           </a:p>
         </p:txBody>

--- a/results/tcc/presentation/ensino_personalizado_de_matematica_tcc.pptx
+++ b/results/tcc/presentation/ensino_personalizado_de_matematica_tcc.pptx
@@ -5806,7 +5806,7 @@
                 <a:latin typeface="Arial"/>
               </a:rPr>
               <a:t>Instituto Federal Catarinense — Campus Videira
-Snapshot adjudicado: 03/09/2026 · recorte temporal: 2015–2026</a:t>
+Revisão atualizada: 12/10/2026 · corte da busca: 31/08/2026</a:t>
             </a:r>
           </a:p>
         </p:txBody>
@@ -6715,8 +6715,8 @@
         </p:blipFill>
         <p:spPr>
           <a:xfrm>
-            <a:off x="548640" y="1275734"/>
-            <a:ext cx="5486400" cy="2203412"/>
+            <a:off x="548640" y="1276227"/>
+            <a:ext cx="5486400" cy="2202425"/>
           </a:xfrm>
           <a:prstGeom prst="rect">
             <a:avLst/>
@@ -7463,7 +7463,7 @@
                 </a:solidFill>
                 <a:latin typeface="Arial"/>
               </a:rPr>
-              <a:t>17</a:t>
+              <a:t>12</a:t>
             </a:r>
           </a:p>
         </p:txBody>
@@ -7502,7 +7502,7 @@
                 </a:solidFill>
                 <a:latin typeface="Arial"/>
               </a:rPr>
-              <a:t>candidatos empíricos provisórios</a:t>
+              <a:t>estudos empíricos incluídos</a:t>
             </a:r>
           </a:p>
         </p:txBody>
@@ -7627,7 +7627,7 @@
                 </a:solidFill>
                 <a:latin typeface="Arial"/>
               </a:rPr>
-              <a:t>1</a:t>
+              <a:t>4</a:t>
             </a:r>
           </a:p>
         </p:txBody>
@@ -7666,7 +7666,7 @@
                 </a:solidFill>
                 <a:latin typeface="Arial"/>
               </a:rPr>
-              <a:t>protocolo ou proposta contextual</a:t>
+              <a:t>textos integrais pendentes</a:t>
             </a:r>
           </a:p>
         </p:txBody>
@@ -7791,7 +7791,7 @@
                 </a:solidFill>
                 <a:latin typeface="Arial"/>
               </a:rPr>
-              <a:t>O que entra na síntese</a:t>
+              <a:t>Desfecho da seleção</a:t>
             </a:r>
           </a:p>
         </p:txBody>
@@ -7830,7 +7830,7 @@
                 </a:solidFill>
                 <a:latin typeface="Arial"/>
               </a:rPr>
-              <a:t>A síntese de evidências e a apreciação MMAT aplicável consideram os 17 candidatos empíricos. O protocolo/proposta contextual foi mantido para rastreabilidade do mapeamento, mas não sustenta resultado empírico concluído.</a:t>
+              <a:t>Dos 18 registros shortlistados, 12 estudos empíricos foram incluídos, quatro relatórios não foram recuperados, um registro foi excluído após o resumo e um protocolo sem resultados concluídos foi excluído após texto completo. Os quatro pendentes não receberam MMAT.</a:t>
             </a:r>
           </a:p>
         </p:txBody>
@@ -8581,13 +8581,13 @@
               </a:spcAft>
             </a:pPr>
             <a:r>
-              <a:rPr sz="1400" b="0">
+              <a:rPr sz="1300" b="0">
                 <a:solidFill>
                   <a:srgbClr val="232323"/>
                 </a:solidFill>
                 <a:latin typeface="Arial"/>
               </a:rPr>
-              <a:t>Apreciação preliminar por um revisor: 12 textos primários consultados (9 arquivados e 3 externos) e 5 avaliações com resumo/metadados.</a:t>
+              <a:t>MMAT preliminar em 12 estudos incluídos, com texto integral consultado, por revisor único. Quatro textos não recuperados não receberam MMAT; um registro foi excluído após resumo e um protocolo após texto completo.</a:t>
             </a:r>
           </a:p>
         </p:txBody>
@@ -10304,13 +10304,13 @@
               </a:spcAft>
             </a:pPr>
             <a:r>
-              <a:rPr sz="1300" b="0">
+              <a:rPr sz="1250" b="0">
                 <a:solidFill>
                   <a:srgbClr val="334155"/>
                 </a:solidFill>
                 <a:latin typeface="Arial"/>
               </a:rPr>
-              <a:t>Exemplos localizados, não estimam a frequência da literatura. Cobertura: 12 de 17 textos primários; os demais foram apreciados por resumo/metadados. MMAT preliminar, por revisor único.</a:t>
+              <a:t>Estes exemplos localizados não estimam a frequência da literatura. O núcleo tem 12 estudos incluídos, avaliados em texto integral por um revisor; quatro relatórios não recuperados não receberam MMAT. Um registro foi excluído após resumo e um protocolo após texto completo.</a:t>
             </a:r>
           </a:p>
         </p:txBody>
@@ -12240,9 +12240,9 @@
                 <a:latin typeface="Arial"/>
               </a:rPr>
               <a:t>• um único pesquisador
-• parte da apreciação baseada em resumo/metadados
+• quatro textos integrais pendentes, sem MMAT
 • fontes e idiomas delimitados
-• MMAT preliminar
+• MMAT preliminar nos 12 estudos incluídos
 • sem aplicação funcional ou eficácia pedagógica própria</a:t>
             </a:r>
           </a:p>
@@ -12548,7 +12548,7 @@
                 <a:latin typeface="Arial"/>
               </a:rPr>
               <a:t>Thales Ferreira Batista · Ciência da Computação · IFC Videira
-Snapshot adjudicado: 03/09/2026 · recorte temporal: 2015–2026</a:t>
+Revisão atualizada: 12/10/2026 · corte da busca: 31/08/2026</a:t>
             </a:r>
           </a:p>
         </p:txBody>
@@ -17705,8 +17705,8 @@
         </p:blipFill>
         <p:spPr>
           <a:xfrm>
-            <a:off x="640080" y="1649086"/>
-            <a:ext cx="5623560" cy="3742707"/>
+            <a:off x="640080" y="1650666"/>
+            <a:ext cx="5623560" cy="3739548"/>
           </a:xfrm>
           <a:prstGeom prst="rect">
             <a:avLst/>

--- a/results/tcc/presentation/ensino_personalizado_de_matematica_tcc.pptx
+++ b/results/tcc/presentation/ensino_personalizado_de_matematica_tcc.pptx
@@ -5806,7 +5806,7 @@
                 <a:latin typeface="Arial"/>
               </a:rPr>
               <a:t>Instituto Federal Catarinense — Campus Videira
-Revisão atualizada: 12/10/2026 · corte da busca: 31/08/2026</a:t>
+Revisão atualizada: 14/10/2026 · corte da busca: 31/08/2026</a:t>
             </a:r>
           </a:p>
         </p:txBody>
@@ -7463,7 +7463,7 @@
                 </a:solidFill>
                 <a:latin typeface="Arial"/>
               </a:rPr>
-              <a:t>12</a:t>
+              <a:t>15</a:t>
             </a:r>
           </a:p>
         </p:txBody>
@@ -7502,7 +7502,7 @@
                 </a:solidFill>
                 <a:latin typeface="Arial"/>
               </a:rPr>
-              <a:t>estudos empíricos incluídos</a:t>
+              <a:t>registros empíricos mantidos provisoriamente</a:t>
             </a:r>
           </a:p>
         </p:txBody>
@@ -7627,7 +7627,7 @@
                 </a:solidFill>
                 <a:latin typeface="Arial"/>
               </a:rPr>
-              <a:t>4</a:t>
+              <a:t>1</a:t>
             </a:r>
           </a:p>
         </p:txBody>
@@ -7666,7 +7666,7 @@
                 </a:solidFill>
                 <a:latin typeface="Arial"/>
               </a:rPr>
-              <a:t>textos integrais pendentes</a:t>
+              <a:t>texto integral pendente</a:t>
             </a:r>
           </a:p>
         </p:txBody>
@@ -7830,7 +7830,7 @@
                 </a:solidFill>
                 <a:latin typeface="Arial"/>
               </a:rPr>
-              <a:t>Dos 18 registros shortlistados, 12 estudos empíricos foram incluídos, quatro relatórios não foram recuperados, um registro foi excluído após o resumo e um protocolo sem resultados concluídos foi excluído após texto completo. Os quatro pendentes não receberam MMAT.</a:t>
+              <a:t>Dos 18 registros shortlistados, 15 permanecem provisoriamente no núcleo empírico; um relatório não foi recuperado, um registro foi excluído após o resumo e um protocolo sem resultados concluídos foi excluído após texto completo. O estudo 8 permanece no fluxo, sem respostas MMAT até adjudicar elegibilidade e unidade; o texto não recuperado também não recebeu MMAT.</a:t>
             </a:r>
           </a:p>
         </p:txBody>
@@ -8587,7 +8587,7 @@
                 </a:solidFill>
                 <a:latin typeface="Arial"/>
               </a:rPr>
-              <a:t>MMAT preliminar em 12 estudos incluídos, com texto integral consultado, por revisor único. Quatro textos não recuperados não receberam MMAT; um registro foi excluído após resumo e um protocolo após texto completo.</a:t>
+              <a:t>MMAT preliminar em 14 dos 15 registros empíricos mantidos provisoriamente, por revisor único. O estudo 8 está sem respostas até adjudicação da elegibilidade/unidade; um texto não recuperado também não recebeu MMAT. Um registro foi excluído após resumo e um protocolo após texto completo.</a:t>
             </a:r>
           </a:p>
         </p:txBody>
@@ -10310,7 +10310,7 @@
                 </a:solidFill>
                 <a:latin typeface="Arial"/>
               </a:rPr>
-              <a:t>Estes exemplos localizados não estimam a frequência da literatura. O núcleo tem 12 estudos incluídos, avaliados em texto integral por um revisor; quatro relatórios não recuperados não receberam MMAT. Um registro foi excluído após resumo e um protocolo após texto completo.</a:t>
+              <a:t>Estes exemplos localizados não estimam a frequência da literatura. Quinze registros permanecem provisoriamente no núcleo; o MMAT preliminar abrange 14, e o estudo 8 segue sem respostas até adjudicação da unidade. Um relatório não recuperado não recebeu MMAT; um registro foi excluído após resumo e um protocolo após texto completo.</a:t>
             </a:r>
           </a:p>
         </p:txBody>
@@ -12240,9 +12240,9 @@
                 <a:latin typeface="Arial"/>
               </a:rPr>
               <a:t>• um único pesquisador
-• quatro textos integrais pendentes, sem MMAT
+• um texto integral pendente, sem MMAT
 • fontes e idiomas delimitados
-• MMAT preliminar nos 12 estudos incluídos
+• MMAT preliminar em 14 de 15 inclusões provisórias; estudo 8 sem avaliação
 • sem aplicação funcional ou eficácia pedagógica própria</a:t>
             </a:r>
           </a:p>
@@ -12548,7 +12548,7 @@
                 <a:latin typeface="Arial"/>
               </a:rPr>
               <a:t>Thales Ferreira Batista · Ciência da Computação · IFC Videira
-Revisão atualizada: 12/10/2026 · corte da busca: 31/08/2026</a:t>
+Revisão atualizada: 14/10/2026 · corte da busca: 31/08/2026</a:t>
             </a:r>
           </a:p>
         </p:txBody>

--- a/results/tcc/presentation/ensino_personalizado_de_matematica_tcc.pptx
+++ b/results/tcc/presentation/ensino_personalizado_de_matematica_tcc.pptx
@@ -5871,7 +5871,7 @@
                 </a:solidFill>
                 <a:latin typeface="Arial"/>
               </a:rPr>
-              <a:t>Panorama descritivo do snapshot</a:t>
+              <a:t>Panorama descritivo do recorte versionado</a:t>
             </a:r>
           </a:p>
         </p:txBody>
@@ -6906,7 +6906,7 @@
                 </a:solidFill>
                 <a:latin typeface="Arial"/>
               </a:rPr>
-              <a:t>O snapshot foi delimitado a 2015–2026, com data de corte em 31 de agosto de 2026. Como 2026 é parcial, sua barra não deve ser comparada diretamente com anos completos.</a:t>
+              <a:t>O recorte foi delimitado a 2015–2026, com data de corte em 31 de agosto de 2026. Como 2026 é parcial, sua barra não deve ser comparada diretamente com anos completos.</a:t>
             </a:r>
           </a:p>
         </p:txBody>
@@ -7830,7 +7830,7 @@
                 </a:solidFill>
                 <a:latin typeface="Arial"/>
               </a:rPr>
-              <a:t>Dos 18 registros shortlistados, 15 permanecem provisoriamente no núcleo empírico; um relatório não foi recuperado, um registro foi excluído após o resumo e um protocolo sem resultados concluídos foi excluído após texto completo. O estudo 8 permanece no fluxo, sem respostas MMAT até adjudicar elegibilidade e unidade; o texto não recuperado também não recebeu MMAT.</a:t>
+              <a:t>Dos 18 registros selecionados preliminarmente, um foi excluído após o resumo. Dos 17 relatórios procurados, um não foi recuperado e 16 foram avaliados em texto completo; um protocolo sem resultados concluídos foi excluído após essa avaliação e 15 registros empíricos permanecem provisoriamente no núcleo. O estudo 8 aguarda adjudicação de elegibilidade e unidade de análise; o relatório não recuperado não recebeu MMAT.</a:t>
             </a:r>
           </a:p>
         </p:txBody>
@@ -16303,7 +16303,7 @@
                 </a:solidFill>
                 <a:latin typeface="Arial"/>
               </a:rPr>
-              <a:t>Contagens do snapshot adjudicado</a:t>
+              <a:t>Contagens do recorte versionado</a:t>
             </a:r>
           </a:p>
         </p:txBody>

--- a/results/tcc/presentation/ensino_personalizado_de_matematica_tcc.pptx
+++ b/results/tcc/presentation/ensino_personalizado_de_matematica_tcc.pptx
@@ -5806,7 +5806,7 @@
                 <a:latin typeface="Arial"/>
               </a:rPr>
               <a:t>Instituto Federal Catarinense — Campus Videira
-Revisão atualizada: 14/10/2026 · corte da busca: 31/08/2026</a:t>
+Versão revisada: 15/10/2026 · corte da busca: 31/08/2026</a:t>
             </a:r>
           </a:p>
         </p:txBody>
@@ -8587,7 +8587,7 @@
                 </a:solidFill>
                 <a:latin typeface="Arial"/>
               </a:rPr>
-              <a:t>MMAT preliminar em 14 dos 15 registros empíricos mantidos provisoriamente, por revisor único. O estudo 8 está sem respostas até adjudicação da elegibilidade/unidade; um texto não recuperado também não recebeu MMAT. Um registro foi excluído após resumo e um protocolo após texto completo.</a:t>
+              <a:t>15 empíricos provisórios. S1/S2: 14; Q1–Q5: 11. Estudos 5, 7 e 14 aguardam categoria; estudo 8 aguarda unidade. Um texto não recuperado, sem MMAT. Julgamentos de revisor único.</a:t>
             </a:r>
           </a:p>
         </p:txBody>
@@ -9943,7 +9943,7 @@
                 </a:solidFill>
                 <a:latin typeface="Arial"/>
               </a:rPr>
-              <a:t>Os métodos descrevem seis semanas, mas os resultados chegam à oitava, sem conciliação nos trechos consultados (pp. 14, 22). Não se deve impor duração única à síntese.</a:t>
+              <a:t>Os métodos descrevem seis semanas, mas a subanálise de programação reporta resultados na oitava, sem conciliação nos trechos consultados (pp. 14, 22). Não se deve impor duração única à síntese.</a:t>
             </a:r>
           </a:p>
         </p:txBody>
@@ -10310,7 +10310,7 @@
                 </a:solidFill>
                 <a:latin typeface="Arial"/>
               </a:rPr>
-              <a:t>Estes exemplos localizados não estimam a frequência da literatura. Quinze registros permanecem provisoriamente no núcleo; o MMAT preliminar abrange 14, e o estudo 8 segue sem respostas até adjudicação da unidade. Um relatório não recuperado não recebeu MMAT; um registro foi excluído após resumo e um protocolo após texto completo.</a:t>
+              <a:t>Estes exemplos localizados não estimam a frequência da literatura. Quinze registros permanecem provisoriamente no núcleo; há 14 triagens S1/S2 e 11 apreciações por categoria, e o estudo 8 segue sem respostas até adjudicação da unidade. Um relatório não recuperado não recebeu MMAT; um registro foi excluído após resumo e um protocolo após texto completo.</a:t>
             </a:r>
           </a:p>
         </p:txBody>
@@ -12242,7 +12242,7 @@
               <a:t>• um único pesquisador
 • um texto integral pendente, sem MMAT
 • fontes e idiomas delimitados
-• MMAT preliminar em 14 de 15 inclusões provisórias; estudo 8 sem avaliação
+• MMAT: 14 triagens, 11 apreciações por categoria; estudo 8 sem avaliação
 • sem aplicação funcional ou eficácia pedagógica própria</a:t>
             </a:r>
           </a:p>
@@ -12548,7 +12548,7 @@
                 <a:latin typeface="Arial"/>
               </a:rPr>
               <a:t>Thales Ferreira Batista · Ciência da Computação · IFC Videira
-Revisão atualizada: 14/10/2026 · corte da busca: 31/08/2026</a:t>
+Versão revisada: 15/10/2026 · corte da busca: 31/08/2026</a:t>
             </a:r>
           </a:p>
         </p:txBody>

--- a/results/tcc/presentation/ensino_personalizado_de_matematica_tcc.pptx
+++ b/results/tcc/presentation/ensino_personalizado_de_matematica_tcc.pptx
@@ -7955,7 +7955,7 @@
                 </a:solidFill>
                 <a:latin typeface="Arial"/>
               </a:rPr>
-              <a:t>Padrão observado</a:t>
+              <a:t>Exemplos observados</a:t>
             </a:r>
           </a:p>
         </p:txBody>
@@ -7994,7 +7994,7 @@
                 </a:solidFill>
                 <a:latin typeface="Arial"/>
               </a:rPr>
-              <a:t>Predomínio de aplicações voltadas à predição de desempenho e à estimativa de proficiência, com recorrência de modelos supervisionados como Random Forest, SVM, árvores de decisão e redes neurais.</a:t>
+              <a:t>Há classificação e predição de resultados matemáticos, com RF, SVM, árvores e redes neurais entre as alternativas examinadas. Categorias operacionais de desempenho não equivalem automaticamente a níveis de proficiência validados.</a:t>
             </a:r>
           </a:p>
         </p:txBody>
@@ -9019,7 +9019,7 @@
                 </a:solidFill>
                 <a:latin typeface="Arial"/>
               </a:rPr>
-              <a:t>A literatura oferece um mapa auditável de técnicas, finalidades e formas de avaliação aplicadas à educação matemática.</a:t>
+              <a:t>O recorte examinado oferece exemplos auditáveis de técnicas, finalidades e formas de avaliação aplicadas à educação matemática.</a:t>
             </a:r>
           </a:p>
         </p:txBody>

--- a/results/tcc/presentation/ensino_personalizado_de_matematica_tcc.pptx
+++ b/results/tcc/presentation/ensino_personalizado_de_matematica_tcc.pptx
@@ -8587,7 +8587,7 @@
                 </a:solidFill>
                 <a:latin typeface="Arial"/>
               </a:rPr>
-              <a:t>15 empíricos provisórios. S1/S2: 14; Q1–Q5: 11. Estudos 5, 7 e 14 aguardam categoria; estudo 8 aguarda unidade. Um texto não recuperado, sem MMAT. Julgamentos de revisor único.</a:t>
+              <a:t>15 registros provisórios. S1/S2: 14; Q1–Q5: 11. Estudos 5, 7 e 14 aguardam categoria; estudo 8 aguarda unidade. Um texto não recuperado, sem MMAT. Conferência humana pendente.</a:t>
             </a:r>
           </a:p>
         </p:txBody>
@@ -14435,7 +14435,7 @@
                 </a:solidFill>
                 <a:latin typeface="Arial"/>
               </a:rPr>
-              <a:t>Propor um protocolo para avaliação futura dos aspectos técnicos e de adequação pedagógica.</a:t>
+              <a:t>Propor um protocolo para avaliar a viabilidade e a coerência da especificação conceitual; aplicação pendente.</a:t>
             </a:r>
           </a:p>
         </p:txBody>
@@ -14474,7 +14474,7 @@
                 </a:solidFill>
                 <a:latin typeface="Arial"/>
               </a:rPr>
-              <a:t>Revisão, MMAT preliminar e pipeline são meios metodológicos. Propor o protocolo não equivale a executá-lo nem comprova eficácia pedagógica.</a:t>
+              <a:t>Revisão, MMAT preliminar e pipeline são meios. O protocolo proposto avalia a especificação conceitual; aplicação pendente. Experimento do protótipo é contingência.</a:t>
             </a:r>
           </a:p>
         </p:txBody>

--- a/results/tcc/presentation/ensino_personalizado_de_matematica_tcc.pptx
+++ b/results/tcc/presentation/ensino_personalizado_de_matematica_tcc.pptx
@@ -5806,7 +5806,7 @@
                 <a:latin typeface="Arial"/>
               </a:rPr>
               <a:t>Instituto Federal Catarinense — Campus Videira
-Snapshot adjudicado: 03/09/2026 · recorte temporal: 2015–2026</a:t>
+Versão revisada: 15/10/2026 · corte da busca: 31/08/2026</a:t>
             </a:r>
           </a:p>
         </p:txBody>
@@ -5871,7 +5871,7 @@
                 </a:solidFill>
                 <a:latin typeface="Arial"/>
               </a:rPr>
-              <a:t>Panorama descritivo do snapshot</a:t>
+              <a:t>Panorama descritivo do recorte versionado</a:t>
             </a:r>
           </a:p>
         </p:txBody>
@@ -6715,8 +6715,8 @@
         </p:blipFill>
         <p:spPr>
           <a:xfrm>
-            <a:off x="548640" y="1275734"/>
-            <a:ext cx="5486400" cy="2203412"/>
+            <a:off x="548640" y="1276227"/>
+            <a:ext cx="5486400" cy="2202425"/>
           </a:xfrm>
           <a:prstGeom prst="rect">
             <a:avLst/>
@@ -6739,8 +6739,8 @@
         </p:blipFill>
         <p:spPr>
           <a:xfrm>
-            <a:off x="6172200" y="1230414"/>
-            <a:ext cx="5486400" cy="2294051"/>
+            <a:off x="7187460" y="1143000"/>
+            <a:ext cx="3455879" cy="2468880"/>
           </a:xfrm>
           <a:prstGeom prst="rect">
             <a:avLst/>
@@ -6906,7 +6906,7 @@
                 </a:solidFill>
                 <a:latin typeface="Arial"/>
               </a:rPr>
-              <a:t>O snapshot foi delimitado a 2015–2026, com data de corte em 31 de agosto de 2026. Como 2026 é parcial, sua barra não deve ser comparada diretamente com anos completos.</a:t>
+              <a:t>O recorte foi delimitado a 2015–2026, com data de corte em 31 de agosto de 2026. Como 2026 é parcial, sua barra não deve ser comparada diretamente com anos completos.</a:t>
             </a:r>
           </a:p>
         </p:txBody>
@@ -7174,7 +7174,7 @@
                 </a:solidFill>
                 <a:latin typeface="Arial"/>
               </a:rPr>
-              <a:t>População retida e síntese empírica</a:t>
+              <a:t>Conjunto retido e síntese empírica</a:t>
             </a:r>
           </a:p>
         </p:txBody>
@@ -7463,7 +7463,7 @@
                 </a:solidFill>
                 <a:latin typeface="Arial"/>
               </a:rPr>
-              <a:t>17</a:t>
+              <a:t>15</a:t>
             </a:r>
           </a:p>
         </p:txBody>
@@ -7502,7 +7502,7 @@
                 </a:solidFill>
                 <a:latin typeface="Arial"/>
               </a:rPr>
-              <a:t>candidatos empíricos provisórios</a:t>
+              <a:t>registros empíricos mantidos provisoriamente</a:t>
             </a:r>
           </a:p>
         </p:txBody>
@@ -7666,7 +7666,7 @@
                 </a:solidFill>
                 <a:latin typeface="Arial"/>
               </a:rPr>
-              <a:t>protocolo ou proposta contextual</a:t>
+              <a:t>texto integral pendente</a:t>
             </a:r>
           </a:p>
         </p:txBody>
@@ -7791,7 +7791,7 @@
                 </a:solidFill>
                 <a:latin typeface="Arial"/>
               </a:rPr>
-              <a:t>O que entra na síntese</a:t>
+              <a:t>Desfecho da seleção</a:t>
             </a:r>
           </a:p>
         </p:txBody>
@@ -7830,7 +7830,7 @@
                 </a:solidFill>
                 <a:latin typeface="Arial"/>
               </a:rPr>
-              <a:t>A síntese de evidências e a apreciação MMAT aplicável consideram os 17 candidatos empíricos. O protocolo/proposta contextual foi mantido para rastreabilidade do mapeamento, mas não sustenta resultado empírico concluído.</a:t>
+              <a:t>Dos 18 registros selecionados preliminarmente, um foi excluído após o resumo. Dos 17 relatórios procurados, um não foi recuperado e 16 foram avaliados em texto completo; um protocolo sem resultados concluídos foi excluído após essa avaliação e 15 registros empíricos permanecem provisoriamente no núcleo. O estudo 8 aguarda adjudicação de elegibilidade e unidade de análise; o relatório não recuperado não recebeu MMAT.</a:t>
             </a:r>
           </a:p>
         </p:txBody>
@@ -7955,7 +7955,7 @@
                 </a:solidFill>
                 <a:latin typeface="Arial"/>
               </a:rPr>
-              <a:t>Padrão observado</a:t>
+              <a:t>Exemplos observados</a:t>
             </a:r>
           </a:p>
         </p:txBody>
@@ -7994,7 +7994,7 @@
                 </a:solidFill>
                 <a:latin typeface="Arial"/>
               </a:rPr>
-              <a:t>Predomínio de aplicações voltadas à predição de desempenho e à estimativa de proficiência, com recorrência de modelos supervisionados como Random Forest, SVM, árvores de decisão e redes neurais.</a:t>
+              <a:t>Há classificação e predição de resultados matemáticos, com RF, SVM, árvores e redes neurais entre as alternativas examinadas. Categorias operacionais de desempenho não equivalem automaticamente a níveis de proficiência validados.</a:t>
             </a:r>
           </a:p>
         </p:txBody>
@@ -8581,13 +8581,13 @@
               </a:spcAft>
             </a:pPr>
             <a:r>
-              <a:rPr sz="1400" b="0">
+              <a:rPr sz="1300" b="0">
                 <a:solidFill>
                   <a:srgbClr val="232323"/>
                 </a:solidFill>
                 <a:latin typeface="Arial"/>
               </a:rPr>
-              <a:t>Apreciação preliminar por um único revisor: nove registros com texto primário revisado e oito com base em resumo/metadados.</a:t>
+              <a:t>15 registros provisórios. S1/S2: 14; Q1–Q5: 11. Estudos 5, 7 e 14 aguardam categoria; estudo 8 aguarda unidade. Um texto não recuperado, sem MMAT. Conferência humana pendente.</a:t>
             </a:r>
           </a:p>
         </p:txBody>
@@ -9019,7 +9019,7 @@
                 </a:solidFill>
                 <a:latin typeface="Arial"/>
               </a:rPr>
-              <a:t>A literatura oferece um mapa auditável de técnicas, finalidades e formas de avaliação aplicadas à educação matemática.</a:t>
+              <a:t>O recorte examinado oferece exemplos auditáveis de técnicas, finalidades e formas de avaliação aplicadas à educação matemática.</a:t>
             </a:r>
           </a:p>
         </p:txBody>
@@ -9615,7 +9615,7 @@
                 </a:solidFill>
                 <a:latin typeface="Arial"/>
               </a:rPr>
-              <a:t>Lacunas documentadas</a:t>
+              <a:t>Limitações localizadas nos estudos consultados</a:t>
             </a:r>
           </a:p>
         </p:txBody>
@@ -9628,8 +9628,8 @@
         </p:nvSpPr>
         <p:spPr>
           <a:xfrm>
-            <a:off x="685800" y="1143000"/>
-            <a:ext cx="3337560" cy="1417320"/>
+            <a:off x="685800" y="1097280"/>
+            <a:ext cx="5257800" cy="1737360"/>
           </a:xfrm>
           <a:prstGeom prst="rect">
             <a:avLst/>
@@ -9671,8 +9671,8 @@
         </p:nvSpPr>
         <p:spPr>
           <a:xfrm>
-            <a:off x="685800" y="1143000"/>
-            <a:ext cx="59436" cy="1417320"/>
+            <a:off x="685800" y="1097280"/>
+            <a:ext cx="59436" cy="1737360"/>
           </a:xfrm>
           <a:prstGeom prst="rect">
             <a:avLst/>
@@ -9714,8 +9714,8 @@
         </p:nvSpPr>
         <p:spPr>
           <a:xfrm>
-            <a:off x="868680" y="1197864"/>
-            <a:ext cx="3063240" cy="384048"/>
+            <a:off x="868680" y="1152144"/>
+            <a:ext cx="4983480" cy="384048"/>
           </a:xfrm>
           <a:prstGeom prst="rect">
             <a:avLst/>
@@ -9734,13 +9734,13 @@
               </a:spcAft>
             </a:pPr>
             <a:r>
-              <a:rPr sz="1500" b="1">
+              <a:rPr sz="1600" b="1">
                 <a:solidFill>
                   <a:srgbClr val="0F0F0F"/>
                 </a:solidFill>
                 <a:latin typeface="Arial"/>
               </a:rPr>
-              <a:t>Explicabilidade</a:t>
+              <a:t>He et al. (2025)</a:t>
             </a:r>
           </a:p>
         </p:txBody>
@@ -9753,8 +9753,8 @@
         </p:nvSpPr>
         <p:spPr>
           <a:xfrm>
-            <a:off x="868680" y="1600200"/>
-            <a:ext cx="3063240" cy="896113"/>
+            <a:off x="868680" y="1554480"/>
+            <a:ext cx="4983480" cy="1216153"/>
           </a:xfrm>
           <a:prstGeom prst="rect">
             <a:avLst/>
@@ -9773,13 +9773,13 @@
               </a:spcAft>
             </a:pPr>
             <a:r>
-              <a:rPr sz="1350" b="0">
+              <a:rPr sz="1300" b="0">
                 <a:solidFill>
                   <a:srgbClr val="232323"/>
                 </a:solidFill>
                 <a:latin typeface="Arial"/>
               </a:rPr>
-              <a:t>Pouca clareza sobre como as saídas chegam à interpretação pedagógica.</a:t>
+              <a:t>Oito turmas de 45 estudantes são descritas, mas a amostra declarada é n=90; docentes também se distribuem de modo desigual entre condições (pp. 1, 16, 31–35). Isso exige cautela com denominadores e possível confundimento.</a:t>
             </a:r>
           </a:p>
         </p:txBody>
@@ -9792,8 +9792,8 @@
         </p:nvSpPr>
         <p:spPr>
           <a:xfrm>
-            <a:off x="4434840" y="1143000"/>
-            <a:ext cx="3337560" cy="1417320"/>
+            <a:off x="6217920" y="1097280"/>
+            <a:ext cx="5257800" cy="1737360"/>
           </a:xfrm>
           <a:prstGeom prst="rect">
             <a:avLst/>
@@ -9835,8 +9835,8 @@
         </p:nvSpPr>
         <p:spPr>
           <a:xfrm>
-            <a:off x="4434840" y="1143000"/>
-            <a:ext cx="59436" cy="1417320"/>
+            <a:off x="6217920" y="1097280"/>
+            <a:ext cx="59436" cy="1737360"/>
           </a:xfrm>
           <a:prstGeom prst="rect">
             <a:avLst/>
@@ -9878,8 +9878,8 @@
         </p:nvSpPr>
         <p:spPr>
           <a:xfrm>
-            <a:off x="4617720" y="1197864"/>
-            <a:ext cx="3063240" cy="384048"/>
+            <a:off x="6400800" y="1152144"/>
+            <a:ext cx="4983480" cy="384048"/>
           </a:xfrm>
           <a:prstGeom prst="rect">
             <a:avLst/>
@@ -9898,13 +9898,13 @@
               </a:spcAft>
             </a:pPr>
             <a:r>
-              <a:rPr sz="1500" b="1">
+              <a:rPr sz="1600" b="1">
                 <a:solidFill>
                   <a:srgbClr val="0F0F0F"/>
                 </a:solidFill>
                 <a:latin typeface="Arial"/>
               </a:rPr>
-              <a:t>Currículo</a:t>
+              <a:t>Villegas-Ch et al. (2025)</a:t>
             </a:r>
           </a:p>
         </p:txBody>
@@ -9917,8 +9917,8 @@
         </p:nvSpPr>
         <p:spPr>
           <a:xfrm>
-            <a:off x="4617720" y="1600200"/>
-            <a:ext cx="3063240" cy="896113"/>
+            <a:off x="6400800" y="1554480"/>
+            <a:ext cx="4983480" cy="1216153"/>
           </a:xfrm>
           <a:prstGeom prst="rect">
             <a:avLst/>
@@ -9937,13 +9937,13 @@
               </a:spcAft>
             </a:pPr>
             <a:r>
-              <a:rPr sz="1350" b="0">
+              <a:rPr sz="1300" b="0">
                 <a:solidFill>
                   <a:srgbClr val="232323"/>
                 </a:solidFill>
                 <a:latin typeface="Arial"/>
               </a:rPr>
-              <a:t>Alinhamento explícito com referenciais curriculares aparece de forma limitada.</a:t>
+              <a:t>Os métodos descrevem seis semanas, mas a subanálise de programação reporta resultados na oitava, sem conciliação nos trechos consultados (pp. 14, 22). Não se deve impor duração única à síntese.</a:t>
             </a:r>
           </a:p>
         </p:txBody>
@@ -9956,8 +9956,8 @@
         </p:nvSpPr>
         <p:spPr>
           <a:xfrm>
-            <a:off x="8183879" y="1143000"/>
-            <a:ext cx="3337560" cy="1417320"/>
+            <a:off x="685800" y="3063239"/>
+            <a:ext cx="5257800" cy="1737360"/>
           </a:xfrm>
           <a:prstGeom prst="rect">
             <a:avLst/>
@@ -9999,8 +9999,8 @@
         </p:nvSpPr>
         <p:spPr>
           <a:xfrm>
-            <a:off x="8183879" y="1143000"/>
-            <a:ext cx="59436" cy="1417320"/>
+            <a:off x="685800" y="3063239"/>
+            <a:ext cx="59436" cy="1737360"/>
           </a:xfrm>
           <a:prstGeom prst="rect">
             <a:avLst/>
@@ -10042,8 +10042,8 @@
         </p:nvSpPr>
         <p:spPr>
           <a:xfrm>
-            <a:off x="8366759" y="1197864"/>
-            <a:ext cx="3063240" cy="384048"/>
+            <a:off x="868680" y="3118103"/>
+            <a:ext cx="4983480" cy="384048"/>
           </a:xfrm>
           <a:prstGeom prst="rect">
             <a:avLst/>
@@ -10062,13 +10062,13 @@
               </a:spcAft>
             </a:pPr>
             <a:r>
-              <a:rPr sz="1500" b="1">
+              <a:rPr sz="1600" b="1">
                 <a:solidFill>
                   <a:srgbClr val="0F0F0F"/>
                 </a:solidFill>
                 <a:latin typeface="Arial"/>
               </a:rPr>
-              <a:t>Participação docente</a:t>
+              <a:t>Nyantah et al. (2025)</a:t>
             </a:r>
           </a:p>
         </p:txBody>
@@ -10081,8 +10081,8 @@
         </p:nvSpPr>
         <p:spPr>
           <a:xfrm>
-            <a:off x="8366759" y="1600200"/>
-            <a:ext cx="3063240" cy="896113"/>
+            <a:off x="868680" y="3520439"/>
+            <a:ext cx="4983480" cy="1216153"/>
           </a:xfrm>
           <a:prstGeom prst="rect">
             <a:avLst/>
@@ -10101,13 +10101,13 @@
               </a:spcAft>
             </a:pPr>
             <a:r>
-              <a:rPr sz="1350" b="0">
+              <a:rPr sz="1300" b="0">
                 <a:solidFill>
                   <a:srgbClr val="232323"/>
                 </a:solidFill>
                 <a:latin typeface="Arial"/>
               </a:rPr>
-              <a:t>Decisões de projeto nem sempre incorporam o professor como intérprete.</a:t>
+              <a:t>A alocação é descrita de modo incompatível; há diferença no pré-teste e a intervenção combina animação e jigsaw (pp. 101–105). O resultado não deve ser atribuído à animação isoladamente.</a:t>
             </a:r>
           </a:p>
         </p:txBody>
@@ -10120,8 +10120,8 @@
         </p:nvSpPr>
         <p:spPr>
           <a:xfrm>
-            <a:off x="685800" y="2971800"/>
-            <a:ext cx="3337560" cy="1417320"/>
+            <a:off x="6217920" y="3063239"/>
+            <a:ext cx="5257800" cy="1737360"/>
           </a:xfrm>
           <a:prstGeom prst="rect">
             <a:avLst/>
@@ -10163,8 +10163,8 @@
         </p:nvSpPr>
         <p:spPr>
           <a:xfrm>
-            <a:off x="685800" y="2971800"/>
-            <a:ext cx="59436" cy="1417320"/>
+            <a:off x="6217920" y="3063239"/>
+            <a:ext cx="59436" cy="1737360"/>
           </a:xfrm>
           <a:prstGeom prst="rect">
             <a:avLst/>
@@ -10206,8 +10206,8 @@
         </p:nvSpPr>
         <p:spPr>
           <a:xfrm>
-            <a:off x="868680" y="3026664"/>
-            <a:ext cx="3063240" cy="384048"/>
+            <a:off x="6400800" y="3118103"/>
+            <a:ext cx="4983480" cy="384048"/>
           </a:xfrm>
           <a:prstGeom prst="rect">
             <a:avLst/>
@@ -10226,13 +10226,13 @@
               </a:spcAft>
             </a:pPr>
             <a:r>
-              <a:rPr sz="1500" b="1">
+              <a:rPr sz="1600" b="1">
                 <a:solidFill>
                   <a:srgbClr val="0F0F0F"/>
                 </a:solidFill>
                 <a:latin typeface="Arial"/>
               </a:rPr>
-              <a:t>Equidade</a:t>
+              <a:t>Echeveria et al. (2025)</a:t>
             </a:r>
           </a:p>
         </p:txBody>
@@ -10245,8 +10245,8 @@
         </p:nvSpPr>
         <p:spPr>
           <a:xfrm>
-            <a:off x="868680" y="3429000"/>
-            <a:ext cx="3063240" cy="896113"/>
+            <a:off x="6400800" y="3520439"/>
+            <a:ext cx="4983480" cy="1216153"/>
           </a:xfrm>
           <a:prstGeom prst="rect">
             <a:avLst/>
@@ -10265,113 +10265,27 @@
               </a:spcAft>
             </a:pPr>
             <a:r>
-              <a:rPr sz="1350" b="0">
+              <a:rPr sz="1300" b="0">
                 <a:solidFill>
                   <a:srgbClr val="232323"/>
                 </a:solidFill>
                 <a:latin typeface="Arial"/>
               </a:rPr>
-              <a:t>Análises de possíveis vieses e diferenças entre grupos são escassas.</a:t>
-            </a:r>
-          </a:p>
-        </p:txBody>
-      </p:sp>
-      <p:sp>
-        <p:nvSpPr>
-          <p:cNvPr id="19" name="Rectangle 18"/>
-          <p:cNvSpPr/>
-          <p:nvPr/>
-        </p:nvSpPr>
-        <p:spPr>
-          <a:xfrm>
-            <a:off x="4434840" y="2971800"/>
-            <a:ext cx="3337560" cy="1417320"/>
-          </a:xfrm>
-          <a:prstGeom prst="rect">
-            <a:avLst/>
-          </a:prstGeom>
-          <a:solidFill>
-            <a:srgbClr val="FFFFFF"/>
-          </a:solidFill>
-          <a:ln>
-            <a:noFill/>
-          </a:ln>
-        </p:spPr>
-        <p:style>
-          <a:lnRef idx="1">
-            <a:schemeClr val="accent1"/>
-          </a:lnRef>
-          <a:fillRef idx="3">
-            <a:schemeClr val="accent1"/>
-          </a:fillRef>
-          <a:effectRef idx="2">
-            <a:schemeClr val="accent1"/>
-          </a:effectRef>
-          <a:fontRef idx="minor">
-            <a:schemeClr val="lt1"/>
-          </a:fontRef>
-        </p:style>
-        <p:txBody>
-          <a:bodyPr rtlCol="0" anchor="ctr"/>
-          <a:lstStyle/>
-          <a:p>
-            <a:pPr algn="ctr"/>
-          </a:p>
-        </p:txBody>
-      </p:sp>
-      <p:sp>
-        <p:nvSpPr>
-          <p:cNvPr id="20" name="Rectangle 19"/>
-          <p:cNvSpPr/>
-          <p:nvPr/>
-        </p:nvSpPr>
-        <p:spPr>
-          <a:xfrm>
-            <a:off x="4434840" y="2971800"/>
-            <a:ext cx="59436" cy="1417320"/>
-          </a:xfrm>
-          <a:prstGeom prst="rect">
-            <a:avLst/>
-          </a:prstGeom>
-          <a:solidFill>
-            <a:srgbClr val="EA580C"/>
-          </a:solidFill>
-          <a:ln>
-            <a:noFill/>
-          </a:ln>
-        </p:spPr>
-        <p:style>
-          <a:lnRef idx="1">
-            <a:schemeClr val="accent1"/>
-          </a:lnRef>
-          <a:fillRef idx="3">
-            <a:schemeClr val="accent1"/>
-          </a:fillRef>
-          <a:effectRef idx="2">
-            <a:schemeClr val="accent1"/>
-          </a:effectRef>
-          <a:fontRef idx="minor">
-            <a:schemeClr val="lt1"/>
-          </a:fontRef>
-        </p:style>
-        <p:txBody>
-          <a:bodyPr rtlCol="0" anchor="ctr"/>
-          <a:lstStyle/>
-          <a:p>
-            <a:pPr algn="ctr"/>
-          </a:p>
-        </p:txBody>
-      </p:sp>
-      <p:sp>
-        <p:nvSpPr>
-          <p:cNvPr id="21" name="TextBox 20"/>
+              <a:t>Oito itens usados para formar categorias também aparecem entre os preditores selecionados (pp. 66, 69–70). A classificação não estabelece diagnóstico independente.</a:t>
+            </a:r>
+          </a:p>
+        </p:txBody>
+      </p:sp>
+      <p:sp>
+        <p:nvSpPr>
+          <p:cNvPr id="19" name="TextBox 18"/>
           <p:cNvSpPr txBox="1"/>
           <p:nvPr/>
         </p:nvSpPr>
         <p:spPr>
           <a:xfrm>
-            <a:off x="4617720" y="3026664"/>
-            <a:ext cx="3063240" cy="384048"/>
+            <a:off x="822960" y="5074920"/>
+            <a:ext cx="10561320" cy="640080"/>
           </a:xfrm>
           <a:prstGeom prst="rect">
             <a:avLst/>
@@ -10379,266 +10293,24 @@
           <a:noFill/>
         </p:spPr>
         <p:txBody>
-          <a:bodyPr wrap="square" lIns="54864" rIns="54864" tIns="54864" bIns="54864" anchor="t">
+          <a:bodyPr wrap="square" lIns="54864" rIns="54864" tIns="54864" bIns="54864" anchor="ctr">
             <a:spAutoFit/>
           </a:bodyPr>
           <a:lstStyle/>
           <a:p>
-            <a:pPr algn="l">
+            <a:pPr algn="ctr">
               <a:spcAft>
                 <a:spcPts val="0"/>
               </a:spcAft>
             </a:pPr>
             <a:r>
-              <a:rPr sz="1500" b="1">
-                <a:solidFill>
-                  <a:srgbClr val="0F0F0F"/>
+              <a:rPr sz="1250" b="0">
+                <a:solidFill>
+                  <a:srgbClr val="334155"/>
                 </a:solidFill>
                 <a:latin typeface="Arial"/>
               </a:rPr>
-              <a:t>Reprodutibilidade</a:t>
-            </a:r>
-          </a:p>
-        </p:txBody>
-      </p:sp>
-      <p:sp>
-        <p:nvSpPr>
-          <p:cNvPr id="22" name="TextBox 21"/>
-          <p:cNvSpPr txBox="1"/>
-          <p:nvPr/>
-        </p:nvSpPr>
-        <p:spPr>
-          <a:xfrm>
-            <a:off x="4617720" y="3429000"/>
-            <a:ext cx="3063240" cy="896113"/>
-          </a:xfrm>
-          <a:prstGeom prst="rect">
-            <a:avLst/>
-          </a:prstGeom>
-          <a:noFill/>
-        </p:spPr>
-        <p:txBody>
-          <a:bodyPr wrap="square" lIns="54864" rIns="54864" tIns="54864" bIns="54864" anchor="t">
-            <a:spAutoFit/>
-          </a:bodyPr>
-          <a:lstStyle/>
-          <a:p>
-            <a:pPr algn="l">
-              <a:spcAft>
-                <a:spcPts val="0"/>
-              </a:spcAft>
-            </a:pPr>
-            <a:r>
-              <a:rPr sz="1350" b="0">
-                <a:solidFill>
-                  <a:srgbClr val="232323"/>
-                </a:solidFill>
-                <a:latin typeface="Arial"/>
-              </a:rPr>
-              <a:t>Dados, códigos e detalhes de preparação nem sempre estão disponíveis.</a:t>
-            </a:r>
-          </a:p>
-        </p:txBody>
-      </p:sp>
-      <p:sp>
-        <p:nvSpPr>
-          <p:cNvPr id="23" name="Rectangle 22"/>
-          <p:cNvSpPr/>
-          <p:nvPr/>
-        </p:nvSpPr>
-        <p:spPr>
-          <a:xfrm>
-            <a:off x="8183879" y="2971800"/>
-            <a:ext cx="3337560" cy="1417320"/>
-          </a:xfrm>
-          <a:prstGeom prst="rect">
-            <a:avLst/>
-          </a:prstGeom>
-          <a:solidFill>
-            <a:srgbClr val="FFFFFF"/>
-          </a:solidFill>
-          <a:ln>
-            <a:noFill/>
-          </a:ln>
-        </p:spPr>
-        <p:style>
-          <a:lnRef idx="1">
-            <a:schemeClr val="accent1"/>
-          </a:lnRef>
-          <a:fillRef idx="3">
-            <a:schemeClr val="accent1"/>
-          </a:fillRef>
-          <a:effectRef idx="2">
-            <a:schemeClr val="accent1"/>
-          </a:effectRef>
-          <a:fontRef idx="minor">
-            <a:schemeClr val="lt1"/>
-          </a:fontRef>
-        </p:style>
-        <p:txBody>
-          <a:bodyPr rtlCol="0" anchor="ctr"/>
-          <a:lstStyle/>
-          <a:p>
-            <a:pPr algn="ctr"/>
-          </a:p>
-        </p:txBody>
-      </p:sp>
-      <p:sp>
-        <p:nvSpPr>
-          <p:cNvPr id="24" name="Rectangle 23"/>
-          <p:cNvSpPr/>
-          <p:nvPr/>
-        </p:nvSpPr>
-        <p:spPr>
-          <a:xfrm>
-            <a:off x="8183879" y="2971800"/>
-            <a:ext cx="59436" cy="1417320"/>
-          </a:xfrm>
-          <a:prstGeom prst="rect">
-            <a:avLst/>
-          </a:prstGeom>
-          <a:solidFill>
-            <a:srgbClr val="4F46E5"/>
-          </a:solidFill>
-          <a:ln>
-            <a:noFill/>
-          </a:ln>
-        </p:spPr>
-        <p:style>
-          <a:lnRef idx="1">
-            <a:schemeClr val="accent1"/>
-          </a:lnRef>
-          <a:fillRef idx="3">
-            <a:schemeClr val="accent1"/>
-          </a:fillRef>
-          <a:effectRef idx="2">
-            <a:schemeClr val="accent1"/>
-          </a:effectRef>
-          <a:fontRef idx="minor">
-            <a:schemeClr val="lt1"/>
-          </a:fontRef>
-        </p:style>
-        <p:txBody>
-          <a:bodyPr rtlCol="0" anchor="ctr"/>
-          <a:lstStyle/>
-          <a:p>
-            <a:pPr algn="ctr"/>
-          </a:p>
-        </p:txBody>
-      </p:sp>
-      <p:sp>
-        <p:nvSpPr>
-          <p:cNvPr id="25" name="TextBox 24"/>
-          <p:cNvSpPr txBox="1"/>
-          <p:nvPr/>
-        </p:nvSpPr>
-        <p:spPr>
-          <a:xfrm>
-            <a:off x="8366759" y="3026664"/>
-            <a:ext cx="3063240" cy="384048"/>
-          </a:xfrm>
-          <a:prstGeom prst="rect">
-            <a:avLst/>
-          </a:prstGeom>
-          <a:noFill/>
-        </p:spPr>
-        <p:txBody>
-          <a:bodyPr wrap="square" lIns="54864" rIns="54864" tIns="54864" bIns="54864" anchor="t">
-            <a:spAutoFit/>
-          </a:bodyPr>
-          <a:lstStyle/>
-          <a:p>
-            <a:pPr algn="l">
-              <a:spcAft>
-                <a:spcPts val="0"/>
-              </a:spcAft>
-            </a:pPr>
-            <a:r>
-              <a:rPr sz="1500" b="1">
-                <a:solidFill>
-                  <a:srgbClr val="0F0F0F"/>
-                </a:solidFill>
-                <a:latin typeface="Arial"/>
-              </a:rPr>
-              <a:t>Contexto</a:t>
-            </a:r>
-          </a:p>
-        </p:txBody>
-      </p:sp>
-      <p:sp>
-        <p:nvSpPr>
-          <p:cNvPr id="26" name="TextBox 25"/>
-          <p:cNvSpPr txBox="1"/>
-          <p:nvPr/>
-        </p:nvSpPr>
-        <p:spPr>
-          <a:xfrm>
-            <a:off x="8366759" y="3429000"/>
-            <a:ext cx="3063240" cy="896113"/>
-          </a:xfrm>
-          <a:prstGeom prst="rect">
-            <a:avLst/>
-          </a:prstGeom>
-          <a:noFill/>
-        </p:spPr>
-        <p:txBody>
-          <a:bodyPr wrap="square" lIns="54864" rIns="54864" tIns="54864" bIns="54864" anchor="t">
-            <a:spAutoFit/>
-          </a:bodyPr>
-          <a:lstStyle/>
-          <a:p>
-            <a:pPr algn="l">
-              <a:spcAft>
-                <a:spcPts val="0"/>
-              </a:spcAft>
-            </a:pPr>
-            <a:r>
-              <a:rPr sz="1350" b="0">
-                <a:solidFill>
-                  <a:srgbClr val="232323"/>
-                </a:solidFill>
-                <a:latin typeface="Arial"/>
-              </a:rPr>
-              <a:t>Validações permanecem restritas a populações e cenários específicos.</a:t>
-            </a:r>
-          </a:p>
-        </p:txBody>
-      </p:sp>
-      <p:sp>
-        <p:nvSpPr>
-          <p:cNvPr id="27" name="TextBox 26"/>
-          <p:cNvSpPr txBox="1"/>
-          <p:nvPr/>
-        </p:nvSpPr>
-        <p:spPr>
-          <a:xfrm>
-            <a:off x="914400" y="5806440"/>
-            <a:ext cx="10241280" cy="292608"/>
-          </a:xfrm>
-          <a:prstGeom prst="rect">
-            <a:avLst/>
-          </a:prstGeom>
-          <a:noFill/>
-        </p:spPr>
-        <p:txBody>
-          <a:bodyPr wrap="square" lIns="54864" rIns="54864" tIns="54864" bIns="54864" anchor="t">
-            <a:spAutoFit/>
-          </a:bodyPr>
-          <a:lstStyle/>
-          <a:p>
-            <a:pPr algn="ctr">
-              <a:spcAft>
-                <a:spcPts val="0"/>
-              </a:spcAft>
-            </a:pPr>
-            <a:r>
-              <a:rPr sz="1400" b="0">
-                <a:solidFill>
-                  <a:srgbClr val="64748B"/>
-                </a:solidFill>
-                <a:latin typeface="Arial"/>
-              </a:rPr>
-              <a:t>Essas lacunas foram tratadas como requisitos de projeto — não como prova de que uma solução futura será eficaz.</a:t>
+              <a:t>Estes exemplos localizados não estimam a frequência da literatura. Quinze registros permanecem provisoriamente no núcleo; há 14 triagens S1/S2 e 11 apreciações por categoria, e o estudo 8 segue sem respostas até adjudicação da unidade. Um relatório não recuperado não recebeu MMAT; um registro foi excluído após resumo e um protocolo após texto completo.</a:t>
             </a:r>
           </a:p>
         </p:txBody>
@@ -12568,9 +12240,9 @@
                 <a:latin typeface="Arial"/>
               </a:rPr>
               <a:t>• um único pesquisador
-• parte da apreciação baseada em resumo/metadados
+• um texto integral pendente, sem MMAT
 • fontes e idiomas delimitados
-• MMAT preliminar
+• MMAT: 14 triagens, 11 apreciações por categoria; estudo 8 sem avaliação
 • sem aplicação funcional ou eficácia pedagógica própria</a:t>
             </a:r>
           </a:p>
@@ -12876,7 +12548,7 @@
                 <a:latin typeface="Arial"/>
               </a:rPr>
               <a:t>Thales Ferreira Batista · Ciência da Computação · IFC Videira
-Snapshot adjudicado: 03/09/2026 · recorte temporal: 2015–2026</a:t>
+Versão revisada: 15/10/2026 · corte da busca: 31/08/2026</a:t>
             </a:r>
           </a:p>
         </p:txBody>
@@ -13740,7 +13412,7 @@
                 </a:solidFill>
                 <a:latin typeface="Arial"/>
               </a:rPr>
-              <a:t>Como identificar e sintetizar, por meio de revisão sistemática, as principais técnicas computacionais aplicadas ao ensino de matemática e converter essas evidências em uma especificação de protótipo que apoie o professor?</a:t>
+              <a:t>Como estruturar uma especificação técnica e pedagógica de protótipo para apoiar a interpretação docente da aprendizagem matemática a partir das evidências e técnicas computacionais identificadas na literatura?</a:t>
             </a:r>
           </a:p>
         </p:txBody>
@@ -13904,7 +13576,7 @@
                 </a:solidFill>
                 <a:latin typeface="Arial"/>
               </a:rPr>
-              <a:t>Mapear e analisar sistematicamente as aplicações e elaborar uma especificação técnica e pedagógica para apoiar a interpretação de evidências sobre competências.</a:t>
+              <a:t>Propor uma especificação técnica e pedagógica de protótipo para apoiar a interpretação docente da aprendizagem matemática, fundamentada no mapeamento e na análise da literatura científica.</a:t>
             </a:r>
           </a:p>
         </p:txBody>
@@ -14120,8 +13792,8 @@
         </p:nvSpPr>
         <p:spPr>
           <a:xfrm>
-            <a:off x="685800" y="1143000"/>
-            <a:ext cx="5166360" cy="868680"/>
+            <a:off x="685800" y="1325880"/>
+            <a:ext cx="5166360" cy="1645920"/>
           </a:xfrm>
           <a:prstGeom prst="rect">
             <a:avLst/>
@@ -14163,8 +13835,8 @@
         </p:nvSpPr>
         <p:spPr>
           <a:xfrm>
-            <a:off x="685800" y="1143000"/>
-            <a:ext cx="59436" cy="868680"/>
+            <a:off x="685800" y="1325880"/>
+            <a:ext cx="59436" cy="1645920"/>
           </a:xfrm>
           <a:prstGeom prst="rect">
             <a:avLst/>
@@ -14206,7 +13878,7 @@
         </p:nvSpPr>
         <p:spPr>
           <a:xfrm>
-            <a:off x="868680" y="1197864"/>
+            <a:off x="868680" y="1380744"/>
             <a:ext cx="4892040" cy="384048"/>
           </a:xfrm>
           <a:prstGeom prst="rect">
@@ -14226,7 +13898,7 @@
               </a:spcAft>
             </a:pPr>
             <a:r>
-              <a:rPr sz="1500" b="1">
+              <a:rPr sz="1900" b="1">
                 <a:solidFill>
                   <a:srgbClr val="0F0F0F"/>
                 </a:solidFill>
@@ -14245,8 +13917,8 @@
         </p:nvSpPr>
         <p:spPr>
           <a:xfrm>
-            <a:off x="868680" y="1600200"/>
-            <a:ext cx="4892040" cy="347473"/>
+            <a:off x="868680" y="1783080"/>
+            <a:ext cx="4892040" cy="1124713"/>
           </a:xfrm>
           <a:prstGeom prst="rect">
             <a:avLst/>
@@ -14265,13 +13937,13 @@
               </a:spcAft>
             </a:pPr>
             <a:r>
-              <a:rPr sz="1350" b="0">
+              <a:rPr sz="1800" b="0">
                 <a:solidFill>
                   <a:srgbClr val="232323"/>
                 </a:solidFill>
                 <a:latin typeface="Arial"/>
               </a:rPr>
-              <a:t>Revisão sistemática, relatada com apoio do PRISMA 2020, sobre estudos de 2015–2026.</a:t>
+              <a:t>Categorizar técnicas computacionais e finalidades pedagógicas na literatura mapeada.</a:t>
             </a:r>
           </a:p>
         </p:txBody>
@@ -14284,8 +13956,8 @@
         </p:nvSpPr>
         <p:spPr>
           <a:xfrm>
-            <a:off x="685800" y="2286000"/>
-            <a:ext cx="5166360" cy="868680"/>
+            <a:off x="685800" y="3337560"/>
+            <a:ext cx="5166360" cy="1645920"/>
           </a:xfrm>
           <a:prstGeom prst="rect">
             <a:avLst/>
@@ -14327,8 +13999,8 @@
         </p:nvSpPr>
         <p:spPr>
           <a:xfrm>
-            <a:off x="685800" y="2286000"/>
-            <a:ext cx="59436" cy="868680"/>
+            <a:off x="685800" y="3337560"/>
+            <a:ext cx="59436" cy="1645920"/>
           </a:xfrm>
           <a:prstGeom prst="rect">
             <a:avLst/>
@@ -14370,7 +14042,7 @@
         </p:nvSpPr>
         <p:spPr>
           <a:xfrm>
-            <a:off x="868680" y="2340864"/>
+            <a:off x="868680" y="3392424"/>
             <a:ext cx="4892040" cy="384048"/>
           </a:xfrm>
           <a:prstGeom prst="rect">
@@ -14390,7 +14062,7 @@
               </a:spcAft>
             </a:pPr>
             <a:r>
-              <a:rPr sz="1500" b="1">
+              <a:rPr sz="1900" b="1">
                 <a:solidFill>
                   <a:srgbClr val="0F0F0F"/>
                 </a:solidFill>
@@ -14409,8 +14081,8 @@
         </p:nvSpPr>
         <p:spPr>
           <a:xfrm>
-            <a:off x="868680" y="2743200"/>
-            <a:ext cx="4892040" cy="347473"/>
+            <a:off x="868680" y="3794760"/>
+            <a:ext cx="4892040" cy="1124713"/>
           </a:xfrm>
           <a:prstGeom prst="rect">
             <a:avLst/>
@@ -14429,13 +14101,13 @@
               </a:spcAft>
             </a:pPr>
             <a:r>
-              <a:rPr sz="1350" b="0">
+              <a:rPr sz="1800" b="0">
                 <a:solidFill>
                   <a:srgbClr val="232323"/>
                 </a:solidFill>
                 <a:latin typeface="Arial"/>
               </a:rPr>
-              <a:t>Identificação e categorização das abordagens computacionais.</a:t>
+              <a:t>Identificar limitações e lacunas técnicas, pedagógicas, metodológicas e éticas.</a:t>
             </a:r>
           </a:p>
         </p:txBody>
@@ -14448,8 +14120,8 @@
         </p:nvSpPr>
         <p:spPr>
           <a:xfrm>
-            <a:off x="685800" y="3429000"/>
-            <a:ext cx="5166360" cy="868680"/>
+            <a:off x="6309360" y="1325880"/>
+            <a:ext cx="5166360" cy="1645920"/>
           </a:xfrm>
           <a:prstGeom prst="rect">
             <a:avLst/>
@@ -14491,14 +14163,14 @@
         </p:nvSpPr>
         <p:spPr>
           <a:xfrm>
-            <a:off x="685800" y="3429000"/>
-            <a:ext cx="59436" cy="868680"/>
-          </a:xfrm>
-          <a:prstGeom prst="rect">
-            <a:avLst/>
-          </a:prstGeom>
-          <a:solidFill>
-            <a:srgbClr val="2563EB"/>
+            <a:off x="6309360" y="1325880"/>
+            <a:ext cx="59436" cy="1645920"/>
+          </a:xfrm>
+          <a:prstGeom prst="rect">
+            <a:avLst/>
+          </a:prstGeom>
+          <a:solidFill>
+            <a:srgbClr val="0D9488"/>
           </a:solidFill>
           <a:ln>
             <a:noFill/>
@@ -14534,7 +14206,7 @@
         </p:nvSpPr>
         <p:spPr>
           <a:xfrm>
-            <a:off x="868680" y="3483864"/>
+            <a:off x="6492240" y="1380744"/>
             <a:ext cx="4892040" cy="384048"/>
           </a:xfrm>
           <a:prstGeom prst="rect">
@@ -14554,7 +14226,7 @@
               </a:spcAft>
             </a:pPr>
             <a:r>
-              <a:rPr sz="1500" b="1">
+              <a:rPr sz="1900" b="1">
                 <a:solidFill>
                   <a:srgbClr val="0F0F0F"/>
                 </a:solidFill>
@@ -14573,8 +14245,8 @@
         </p:nvSpPr>
         <p:spPr>
           <a:xfrm>
-            <a:off x="868680" y="3886200"/>
-            <a:ext cx="4892040" cy="347473"/>
+            <a:off x="6492240" y="1783080"/>
+            <a:ext cx="4892040" cy="1124713"/>
           </a:xfrm>
           <a:prstGeom prst="rect">
             <a:avLst/>
@@ -14593,13 +14265,13 @@
               </a:spcAft>
             </a:pPr>
             <a:r>
-              <a:rPr sz="1350" b="0">
+              <a:rPr sz="1800" b="0">
                 <a:solidFill>
                   <a:srgbClr val="232323"/>
                 </a:solidFill>
                 <a:latin typeface="Arial"/>
               </a:rPr>
-              <a:t>Classificação das finalidades pedagógicas das aplicações.</a:t>
+              <a:t>Formular requisitos, critérios de dados e modelos e arquitetura de referência para o protótipo.</a:t>
             </a:r>
           </a:p>
         </p:txBody>
@@ -14612,8 +14284,8 @@
         </p:nvSpPr>
         <p:spPr>
           <a:xfrm>
-            <a:off x="685800" y="4572000"/>
-            <a:ext cx="5166360" cy="868680"/>
+            <a:off x="6309360" y="3337560"/>
+            <a:ext cx="5166360" cy="1645920"/>
           </a:xfrm>
           <a:prstGeom prst="rect">
             <a:avLst/>
@@ -14655,14 +14327,14 @@
         </p:nvSpPr>
         <p:spPr>
           <a:xfrm>
-            <a:off x="685800" y="4572000"/>
-            <a:ext cx="59436" cy="868680"/>
-          </a:xfrm>
-          <a:prstGeom prst="rect">
-            <a:avLst/>
-          </a:prstGeom>
-          <a:solidFill>
-            <a:srgbClr val="2563EB"/>
+            <a:off x="6309360" y="3337560"/>
+            <a:ext cx="59436" cy="1645920"/>
+          </a:xfrm>
+          <a:prstGeom prst="rect">
+            <a:avLst/>
+          </a:prstGeom>
+          <a:solidFill>
+            <a:srgbClr val="0D9488"/>
           </a:solidFill>
           <a:ln>
             <a:noFill/>
@@ -14698,7 +14370,7 @@
         </p:nvSpPr>
         <p:spPr>
           <a:xfrm>
-            <a:off x="868680" y="4626864"/>
+            <a:off x="6492240" y="3392424"/>
             <a:ext cx="4892040" cy="384048"/>
           </a:xfrm>
           <a:prstGeom prst="rect">
@@ -14718,7 +14390,7 @@
               </a:spcAft>
             </a:pPr>
             <a:r>
-              <a:rPr sz="1500" b="1">
+              <a:rPr sz="1900" b="1">
                 <a:solidFill>
                   <a:srgbClr val="0F0F0F"/>
                 </a:solidFill>
@@ -14737,8 +14409,8 @@
         </p:nvSpPr>
         <p:spPr>
           <a:xfrm>
-            <a:off x="868680" y="5029200"/>
-            <a:ext cx="4892040" cy="347473"/>
+            <a:off x="6492240" y="3794760"/>
+            <a:ext cx="4892040" cy="1124713"/>
           </a:xfrm>
           <a:prstGeom prst="rect">
             <a:avLst/>
@@ -14757,113 +14429,27 @@
               </a:spcAft>
             </a:pPr>
             <a:r>
-              <a:rPr sz="1350" b="0">
+              <a:rPr sz="1800" b="0">
                 <a:solidFill>
                   <a:srgbClr val="232323"/>
                 </a:solidFill>
                 <a:latin typeface="Arial"/>
               </a:rPr>
-              <a:t>Análise crítica das metodologias e limitações dos estudos.</a:t>
-            </a:r>
-          </a:p>
-        </p:txBody>
-      </p:sp>
-      <p:sp>
-        <p:nvSpPr>
-          <p:cNvPr id="19" name="Rectangle 18"/>
-          <p:cNvSpPr/>
-          <p:nvPr/>
-        </p:nvSpPr>
-        <p:spPr>
-          <a:xfrm>
-            <a:off x="6309360" y="1143000"/>
-            <a:ext cx="5166360" cy="1143000"/>
-          </a:xfrm>
-          <a:prstGeom prst="rect">
-            <a:avLst/>
-          </a:prstGeom>
-          <a:solidFill>
-            <a:srgbClr val="FFFFFF"/>
-          </a:solidFill>
-          <a:ln>
-            <a:noFill/>
-          </a:ln>
-        </p:spPr>
-        <p:style>
-          <a:lnRef idx="1">
-            <a:schemeClr val="accent1"/>
-          </a:lnRef>
-          <a:fillRef idx="3">
-            <a:schemeClr val="accent1"/>
-          </a:fillRef>
-          <a:effectRef idx="2">
-            <a:schemeClr val="accent1"/>
-          </a:effectRef>
-          <a:fontRef idx="minor">
-            <a:schemeClr val="lt1"/>
-          </a:fontRef>
-        </p:style>
-        <p:txBody>
-          <a:bodyPr rtlCol="0" anchor="ctr"/>
-          <a:lstStyle/>
-          <a:p>
-            <a:pPr algn="ctr"/>
-          </a:p>
-        </p:txBody>
-      </p:sp>
-      <p:sp>
-        <p:nvSpPr>
-          <p:cNvPr id="20" name="Rectangle 19"/>
-          <p:cNvSpPr/>
-          <p:nvPr/>
-        </p:nvSpPr>
-        <p:spPr>
-          <a:xfrm>
-            <a:off x="6309360" y="1143000"/>
-            <a:ext cx="59436" cy="1143000"/>
-          </a:xfrm>
-          <a:prstGeom prst="rect">
-            <a:avLst/>
-          </a:prstGeom>
-          <a:solidFill>
-            <a:srgbClr val="0D9488"/>
-          </a:solidFill>
-          <a:ln>
-            <a:noFill/>
-          </a:ln>
-        </p:spPr>
-        <p:style>
-          <a:lnRef idx="1">
-            <a:schemeClr val="accent1"/>
-          </a:lnRef>
-          <a:fillRef idx="3">
-            <a:schemeClr val="accent1"/>
-          </a:fillRef>
-          <a:effectRef idx="2">
-            <a:schemeClr val="accent1"/>
-          </a:effectRef>
-          <a:fontRef idx="minor">
-            <a:schemeClr val="lt1"/>
-          </a:fontRef>
-        </p:style>
-        <p:txBody>
-          <a:bodyPr rtlCol="0" anchor="ctr"/>
-          <a:lstStyle/>
-          <a:p>
-            <a:pPr algn="ctr"/>
-          </a:p>
-        </p:txBody>
-      </p:sp>
-      <p:sp>
-        <p:nvSpPr>
-          <p:cNvPr id="21" name="TextBox 20"/>
+              <a:t>Propor um protocolo para avaliar a viabilidade e a coerência da especificação conceitual; aplicação pendente.</a:t>
+            </a:r>
+          </a:p>
+        </p:txBody>
+      </p:sp>
+      <p:sp>
+        <p:nvSpPr>
+          <p:cNvPr id="19" name="TextBox 18"/>
           <p:cNvSpPr txBox="1"/>
           <p:nvPr/>
         </p:nvSpPr>
         <p:spPr>
           <a:xfrm>
-            <a:off x="6492240" y="1197864"/>
-            <a:ext cx="4892040" cy="384048"/>
+            <a:off x="914400" y="5669280"/>
+            <a:ext cx="10287000" cy="594360"/>
           </a:xfrm>
           <a:prstGeom prst="rect">
             <a:avLst/>
@@ -14876,425 +14462,19 @@
           </a:bodyPr>
           <a:lstStyle/>
           <a:p>
-            <a:pPr algn="l">
+            <a:pPr algn="ctr">
               <a:spcAft>
                 <a:spcPts val="0"/>
               </a:spcAft>
             </a:pPr>
             <a:r>
-              <a:rPr sz="1500" b="1">
-                <a:solidFill>
-                  <a:srgbClr val="0F0F0F"/>
+              <a:rPr sz="1400" b="0">
+                <a:solidFill>
+                  <a:srgbClr val="64748B"/>
                 </a:solidFill>
                 <a:latin typeface="Arial"/>
               </a:rPr>
-              <a:t>OE5</a:t>
-            </a:r>
-          </a:p>
-        </p:txBody>
-      </p:sp>
-      <p:sp>
-        <p:nvSpPr>
-          <p:cNvPr id="22" name="TextBox 21"/>
-          <p:cNvSpPr txBox="1"/>
-          <p:nvPr/>
-        </p:nvSpPr>
-        <p:spPr>
-          <a:xfrm>
-            <a:off x="6492240" y="1600200"/>
-            <a:ext cx="4892040" cy="621793"/>
-          </a:xfrm>
-          <a:prstGeom prst="rect">
-            <a:avLst/>
-          </a:prstGeom>
-          <a:noFill/>
-        </p:spPr>
-        <p:txBody>
-          <a:bodyPr wrap="square" lIns="54864" rIns="54864" tIns="54864" bIns="54864" anchor="t">
-            <a:spAutoFit/>
-          </a:bodyPr>
-          <a:lstStyle/>
-          <a:p>
-            <a:pPr algn="l">
-              <a:spcAft>
-                <a:spcPts val="0"/>
-              </a:spcAft>
-            </a:pPr>
-            <a:r>
-              <a:rPr sz="1350" b="0">
-                <a:solidFill>
-                  <a:srgbClr val="232323"/>
-                </a:solidFill>
-                <a:latin typeface="Arial"/>
-              </a:rPr>
-              <a:t>Mapeamento de lacunas técnicas, pedagógicas, metodológicas e éticas.</a:t>
-            </a:r>
-          </a:p>
-        </p:txBody>
-      </p:sp>
-      <p:sp>
-        <p:nvSpPr>
-          <p:cNvPr id="23" name="Rectangle 22"/>
-          <p:cNvSpPr/>
-          <p:nvPr/>
-        </p:nvSpPr>
-        <p:spPr>
-          <a:xfrm>
-            <a:off x="6309360" y="2560320"/>
-            <a:ext cx="5166360" cy="1143000"/>
-          </a:xfrm>
-          <a:prstGeom prst="rect">
-            <a:avLst/>
-          </a:prstGeom>
-          <a:solidFill>
-            <a:srgbClr val="FFFFFF"/>
-          </a:solidFill>
-          <a:ln>
-            <a:noFill/>
-          </a:ln>
-        </p:spPr>
-        <p:style>
-          <a:lnRef idx="1">
-            <a:schemeClr val="accent1"/>
-          </a:lnRef>
-          <a:fillRef idx="3">
-            <a:schemeClr val="accent1"/>
-          </a:fillRef>
-          <a:effectRef idx="2">
-            <a:schemeClr val="accent1"/>
-          </a:effectRef>
-          <a:fontRef idx="minor">
-            <a:schemeClr val="lt1"/>
-          </a:fontRef>
-        </p:style>
-        <p:txBody>
-          <a:bodyPr rtlCol="0" anchor="ctr"/>
-          <a:lstStyle/>
-          <a:p>
-            <a:pPr algn="ctr"/>
-          </a:p>
-        </p:txBody>
-      </p:sp>
-      <p:sp>
-        <p:nvSpPr>
-          <p:cNvPr id="24" name="Rectangle 23"/>
-          <p:cNvSpPr/>
-          <p:nvPr/>
-        </p:nvSpPr>
-        <p:spPr>
-          <a:xfrm>
-            <a:off x="6309360" y="2560320"/>
-            <a:ext cx="59436" cy="1143000"/>
-          </a:xfrm>
-          <a:prstGeom prst="rect">
-            <a:avLst/>
-          </a:prstGeom>
-          <a:solidFill>
-            <a:srgbClr val="0D9488"/>
-          </a:solidFill>
-          <a:ln>
-            <a:noFill/>
-          </a:ln>
-        </p:spPr>
-        <p:style>
-          <a:lnRef idx="1">
-            <a:schemeClr val="accent1"/>
-          </a:lnRef>
-          <a:fillRef idx="3">
-            <a:schemeClr val="accent1"/>
-          </a:fillRef>
-          <a:effectRef idx="2">
-            <a:schemeClr val="accent1"/>
-          </a:effectRef>
-          <a:fontRef idx="minor">
-            <a:schemeClr val="lt1"/>
-          </a:fontRef>
-        </p:style>
-        <p:txBody>
-          <a:bodyPr rtlCol="0" anchor="ctr"/>
-          <a:lstStyle/>
-          <a:p>
-            <a:pPr algn="ctr"/>
-          </a:p>
-        </p:txBody>
-      </p:sp>
-      <p:sp>
-        <p:nvSpPr>
-          <p:cNvPr id="25" name="TextBox 24"/>
-          <p:cNvSpPr txBox="1"/>
-          <p:nvPr/>
-        </p:nvSpPr>
-        <p:spPr>
-          <a:xfrm>
-            <a:off x="6492240" y="2615184"/>
-            <a:ext cx="4892040" cy="384048"/>
-          </a:xfrm>
-          <a:prstGeom prst="rect">
-            <a:avLst/>
-          </a:prstGeom>
-          <a:noFill/>
-        </p:spPr>
-        <p:txBody>
-          <a:bodyPr wrap="square" lIns="54864" rIns="54864" tIns="54864" bIns="54864" anchor="t">
-            <a:spAutoFit/>
-          </a:bodyPr>
-          <a:lstStyle/>
-          <a:p>
-            <a:pPr algn="l">
-              <a:spcAft>
-                <a:spcPts val="0"/>
-              </a:spcAft>
-            </a:pPr>
-            <a:r>
-              <a:rPr sz="1500" b="1">
-                <a:solidFill>
-                  <a:srgbClr val="0F0F0F"/>
-                </a:solidFill>
-                <a:latin typeface="Arial"/>
-              </a:rPr>
-              <a:t>OE6</a:t>
-            </a:r>
-          </a:p>
-        </p:txBody>
-      </p:sp>
-      <p:sp>
-        <p:nvSpPr>
-          <p:cNvPr id="26" name="TextBox 25"/>
-          <p:cNvSpPr txBox="1"/>
-          <p:nvPr/>
-        </p:nvSpPr>
-        <p:spPr>
-          <a:xfrm>
-            <a:off x="6492240" y="3017520"/>
-            <a:ext cx="4892040" cy="621793"/>
-          </a:xfrm>
-          <a:prstGeom prst="rect">
-            <a:avLst/>
-          </a:prstGeom>
-          <a:noFill/>
-        </p:spPr>
-        <p:txBody>
-          <a:bodyPr wrap="square" lIns="54864" rIns="54864" tIns="54864" bIns="54864" anchor="t">
-            <a:spAutoFit/>
-          </a:bodyPr>
-          <a:lstStyle/>
-          <a:p>
-            <a:pPr algn="l">
-              <a:spcAft>
-                <a:spcPts val="0"/>
-              </a:spcAft>
-            </a:pPr>
-            <a:r>
-              <a:rPr sz="1350" b="0">
-                <a:solidFill>
-                  <a:srgbClr val="232323"/>
-                </a:solidFill>
-                <a:latin typeface="Arial"/>
-              </a:rPr>
-              <a:t>Manutenção de um pipeline automatizado e auditável para coleta, processamento e exportação.</a:t>
-            </a:r>
-          </a:p>
-        </p:txBody>
-      </p:sp>
-      <p:sp>
-        <p:nvSpPr>
-          <p:cNvPr id="27" name="Rectangle 26"/>
-          <p:cNvSpPr/>
-          <p:nvPr/>
-        </p:nvSpPr>
-        <p:spPr>
-          <a:xfrm>
-            <a:off x="6309360" y="3977639"/>
-            <a:ext cx="5166360" cy="1143000"/>
-          </a:xfrm>
-          <a:prstGeom prst="rect">
-            <a:avLst/>
-          </a:prstGeom>
-          <a:solidFill>
-            <a:srgbClr val="FFFFFF"/>
-          </a:solidFill>
-          <a:ln>
-            <a:noFill/>
-          </a:ln>
-        </p:spPr>
-        <p:style>
-          <a:lnRef idx="1">
-            <a:schemeClr val="accent1"/>
-          </a:lnRef>
-          <a:fillRef idx="3">
-            <a:schemeClr val="accent1"/>
-          </a:fillRef>
-          <a:effectRef idx="2">
-            <a:schemeClr val="accent1"/>
-          </a:effectRef>
-          <a:fontRef idx="minor">
-            <a:schemeClr val="lt1"/>
-          </a:fontRef>
-        </p:style>
-        <p:txBody>
-          <a:bodyPr rtlCol="0" anchor="ctr"/>
-          <a:lstStyle/>
-          <a:p>
-            <a:pPr algn="ctr"/>
-          </a:p>
-        </p:txBody>
-      </p:sp>
-      <p:sp>
-        <p:nvSpPr>
-          <p:cNvPr id="28" name="Rectangle 27"/>
-          <p:cNvSpPr/>
-          <p:nvPr/>
-        </p:nvSpPr>
-        <p:spPr>
-          <a:xfrm>
-            <a:off x="6309360" y="3977639"/>
-            <a:ext cx="59436" cy="1143000"/>
-          </a:xfrm>
-          <a:prstGeom prst="rect">
-            <a:avLst/>
-          </a:prstGeom>
-          <a:solidFill>
-            <a:srgbClr val="0D9488"/>
-          </a:solidFill>
-          <a:ln>
-            <a:noFill/>
-          </a:ln>
-        </p:spPr>
-        <p:style>
-          <a:lnRef idx="1">
-            <a:schemeClr val="accent1"/>
-          </a:lnRef>
-          <a:fillRef idx="3">
-            <a:schemeClr val="accent1"/>
-          </a:fillRef>
-          <a:effectRef idx="2">
-            <a:schemeClr val="accent1"/>
-          </a:effectRef>
-          <a:fontRef idx="minor">
-            <a:schemeClr val="lt1"/>
-          </a:fontRef>
-        </p:style>
-        <p:txBody>
-          <a:bodyPr rtlCol="0" anchor="ctr"/>
-          <a:lstStyle/>
-          <a:p>
-            <a:pPr algn="ctr"/>
-          </a:p>
-        </p:txBody>
-      </p:sp>
-      <p:sp>
-        <p:nvSpPr>
-          <p:cNvPr id="29" name="TextBox 28"/>
-          <p:cNvSpPr txBox="1"/>
-          <p:nvPr/>
-        </p:nvSpPr>
-        <p:spPr>
-          <a:xfrm>
-            <a:off x="6492240" y="4032503"/>
-            <a:ext cx="4892040" cy="384048"/>
-          </a:xfrm>
-          <a:prstGeom prst="rect">
-            <a:avLst/>
-          </a:prstGeom>
-          <a:noFill/>
-        </p:spPr>
-        <p:txBody>
-          <a:bodyPr wrap="square" lIns="54864" rIns="54864" tIns="54864" bIns="54864" anchor="t">
-            <a:spAutoFit/>
-          </a:bodyPr>
-          <a:lstStyle/>
-          <a:p>
-            <a:pPr algn="l">
-              <a:spcAft>
-                <a:spcPts val="0"/>
-              </a:spcAft>
-            </a:pPr>
-            <a:r>
-              <a:rPr sz="1500" b="1">
-                <a:solidFill>
-                  <a:srgbClr val="0F0F0F"/>
-                </a:solidFill>
-                <a:latin typeface="Arial"/>
-              </a:rPr>
-              <a:t>OE7</a:t>
-            </a:r>
-          </a:p>
-        </p:txBody>
-      </p:sp>
-      <p:sp>
-        <p:nvSpPr>
-          <p:cNvPr id="30" name="TextBox 29"/>
-          <p:cNvSpPr txBox="1"/>
-          <p:nvPr/>
-        </p:nvSpPr>
-        <p:spPr>
-          <a:xfrm>
-            <a:off x="6492240" y="4434839"/>
-            <a:ext cx="4892040" cy="621793"/>
-          </a:xfrm>
-          <a:prstGeom prst="rect">
-            <a:avLst/>
-          </a:prstGeom>
-          <a:noFill/>
-        </p:spPr>
-        <p:txBody>
-          <a:bodyPr wrap="square" lIns="54864" rIns="54864" tIns="54864" bIns="54864" anchor="t">
-            <a:spAutoFit/>
-          </a:bodyPr>
-          <a:lstStyle/>
-          <a:p>
-            <a:pPr algn="l">
-              <a:spcAft>
-                <a:spcPts val="0"/>
-              </a:spcAft>
-            </a:pPr>
-            <a:r>
-              <a:rPr sz="1350" b="0">
-                <a:solidFill>
-                  <a:srgbClr val="232323"/>
-                </a:solidFill>
-                <a:latin typeface="Arial"/>
-              </a:rPr>
-              <a:t>Derivação de requisitos, critérios de dados e modelos, protocolo de avaliação e arquitetura de referência.</a:t>
-            </a:r>
-          </a:p>
-        </p:txBody>
-      </p:sp>
-      <p:sp>
-        <p:nvSpPr>
-          <p:cNvPr id="31" name="TextBox 30"/>
-          <p:cNvSpPr txBox="1"/>
-          <p:nvPr/>
-        </p:nvSpPr>
-        <p:spPr>
-          <a:xfrm>
-            <a:off x="914400" y="5897880"/>
-            <a:ext cx="10287000" cy="384048"/>
-          </a:xfrm>
-          <a:prstGeom prst="rect">
-            <a:avLst/>
-          </a:prstGeom>
-          <a:noFill/>
-        </p:spPr>
-        <p:txBody>
-          <a:bodyPr wrap="square" lIns="54864" rIns="54864" tIns="54864" bIns="54864" anchor="t">
-            <a:spAutoFit/>
-          </a:bodyPr>
-          <a:lstStyle/>
-          <a:p>
-            <a:pPr algn="ctr">
-              <a:spcAft>
-                <a:spcPts val="0"/>
-              </a:spcAft>
-            </a:pPr>
-            <a:r>
-              <a:rPr sz="1400" b="0">
-                <a:solidFill>
-                  <a:srgbClr val="64748B"/>
-                </a:solidFill>
-                <a:latin typeface="Arial"/>
-              </a:rPr>
-              <a:t>A apresentação distingue objetivos executados de atividades que permanecem fora do escopo, como implementação funcional e validação com participantes.</a:t>
+              <a:t>Revisão, MMAT preliminar e pipeline são meios. O protocolo proposto avalia a especificação conceitual; aplicação pendente. Experimento do protótipo é contingência.</a:t>
             </a:r>
           </a:p>
         </p:txBody>
@@ -15892,7 +15072,7 @@
                 </a:solidFill>
                 <a:latin typeface="Arial"/>
               </a:rPr>
-              <a:t>Mobilização integrada de conhecimentos, procedimentos, estratégias e atitudes.</a:t>
+              <a:t>Mobilização de conhecimentos, habilidades, atitudes e valores para resolver demandas.</a:t>
             </a:r>
           </a:p>
         </p:txBody>
@@ -16056,7 +15236,7 @@
                 </a:solidFill>
                 <a:latin typeface="Arial"/>
               </a:rPr>
-              <a:t>Transformação construída ao longo do tempo, com compreensão, autonomia e transferência.</a:t>
+              <a:t>Neste TCC: mudanças no que o estudante sabe e consegue fazer ao longo do tempo.</a:t>
             </a:r>
           </a:p>
         </p:txBody>
@@ -17084,7 +16264,7 @@
                 </a:solidFill>
                 <a:latin typeface="Arial"/>
               </a:rPr>
-              <a:t>Do registro bruto à população retida</a:t>
+              <a:t>Do registro bruto ao conjunto retido provisoriamente</a:t>
             </a:r>
           </a:p>
         </p:txBody>
@@ -17123,7 +16303,7 @@
                 </a:solidFill>
                 <a:latin typeface="Arial"/>
               </a:rPr>
-              <a:t>Contagens do snapshot adjudicado</a:t>
+              <a:t>Contagens do recorte versionado</a:t>
             </a:r>
           </a:p>
         </p:txBody>
@@ -17944,7 +17124,7 @@
                 </a:solidFill>
                 <a:latin typeface="Arial"/>
               </a:rPr>
-              <a:t>na elegibilidade</a:t>
+              <a:t>submetidos à priorização</a:t>
             </a:r>
           </a:p>
         </p:txBody>
@@ -18108,7 +17288,7 @@
                 </a:solidFill>
                 <a:latin typeface="Arial"/>
               </a:rPr>
-              <a:t>excluídos na elegibilidade</a:t>
+              <a:t>excluídos nessa etapa</a:t>
             </a:r>
           </a:p>
         </p:txBody>
@@ -18285,8 +17465,8 @@
         </p:nvSpPr>
         <p:spPr>
           <a:xfrm>
-            <a:off x="1005840" y="5669280"/>
-            <a:ext cx="10058400" cy="320040"/>
+            <a:off x="777240" y="5623560"/>
+            <a:ext cx="10607040" cy="411480"/>
           </a:xfrm>
           <a:prstGeom prst="rect">
             <a:avLst/>
@@ -18305,13 +17485,13 @@
               </a:spcAft>
             </a:pPr>
             <a:r>
-              <a:rPr sz="1400" b="0">
+              <a:rPr sz="1150" b="0">
                 <a:solidFill>
                   <a:srgbClr val="64748B"/>
                 </a:solidFill>
                 <a:latin typeface="Arial"/>
               </a:rPr>
-              <a:t>A remoção determinística por DOI/URL precede a triagem. Igualdade de título permaneceu como candidato à auditoria semântica.</a:t>
+              <a:t>A priorização dos 2.486 registros usa metadados/resumos e não equivale à elegibilidade em texto completo; títulos repetidos seguem para auditoria semântica.</a:t>
             </a:r>
           </a:p>
         </p:txBody>
@@ -18376,7 +17556,7 @@
                 </a:solidFill>
                 <a:latin typeface="Arial"/>
               </a:rPr>
-              <a:t>Fluxo PRISMA do snapshot</a:t>
+              <a:t>Fluxo operacional do processo de seleção</a:t>
             </a:r>
           </a:p>
         </p:txBody>
@@ -18397,8 +17577,8 @@
         </p:blipFill>
         <p:spPr>
           <a:xfrm>
-            <a:off x="2359571" y="960120"/>
-            <a:ext cx="7488097" cy="5212080"/>
+            <a:off x="1470660" y="960120"/>
+            <a:ext cx="9265920" cy="5212080"/>
           </a:xfrm>
           <a:prstGeom prst="rect">
             <a:avLst/>
@@ -18439,7 +17619,7 @@
                 </a:solidFill>
                 <a:latin typeface="Arial"/>
               </a:rPr>
-              <a:t>Figura versionada e sincronizada com os artefatos públicos do pipeline.</a:t>
+              <a:t>Representação operacional própria; não reproduz todas as etapas do diagrama PRISMA 2020.</a:t>
             </a:r>
           </a:p>
         </p:txBody>
@@ -18525,8 +17705,8 @@
         </p:blipFill>
         <p:spPr>
           <a:xfrm>
-            <a:off x="640080" y="1649878"/>
-            <a:ext cx="5623560" cy="3741123"/>
+            <a:off x="640080" y="1650666"/>
+            <a:ext cx="5623560" cy="3739548"/>
           </a:xfrm>
           <a:prstGeom prst="rect">
             <a:avLst/>

--- a/results/tcc/presentation/ensino_personalizado_de_matematica_tcc.pptx
+++ b/results/tcc/presentation/ensino_personalizado_de_matematica_tcc.pptx
@@ -7830,7 +7830,7 @@
                 </a:solidFill>
                 <a:latin typeface="Arial"/>
               </a:rPr>
-              <a:t>Dos 18 registros selecionados preliminarmente, um foi excluído após o resumo. Dos 17 relatórios procurados, um não foi recuperado e 16 foram avaliados em texto completo; um protocolo sem resultados concluídos foi excluído após essa avaliação e 15 registros empíricos permanecem provisoriamente no núcleo. O estudo 8 aguarda adjudicação de elegibilidade e unidade de análise; o relatório não recuperado não recebeu MMAT.</a:t>
+              <a:t>Dos 18 registros selecionados preliminarmente, um foi excluído após o resumo. Dos 17 relatórios procurados, um não foi recuperado e 16 foram avaliados em texto completo; um protocolo sem resultados concluídos foi excluído após essa avaliação e 15 registros empíricos permanecem provisoriamente no núcleo. Os 15 estudos têm apreciação preliminar, incluindo rotas operacionais explícitas; o relatório não recuperado não recebeu MMAT.</a:t>
             </a:r>
           </a:p>
         </p:txBody>
@@ -8587,7 +8587,7 @@
                 </a:solidFill>
                 <a:latin typeface="Arial"/>
               </a:rPr>
-              <a:t>15 registros provisórios. S1/S2: 14; Q1–Q5: 11. Estudos 5, 7 e 14 aguardam categoria; estudo 8 aguarda unidade. Um texto não recuperado, sem MMAT. Conferência humana pendente.</a:t>
+              <a:t>15 registros provisórios. S1/S2 e Q1–Q5: 15. Estudos 5/7: categoria 3 operacional; 14: sorteio contraditório; 8: categoria 4 adaptada. Um texto não recuperado, sem MMAT. Conferência humana pendente.</a:t>
             </a:r>
           </a:p>
         </p:txBody>
@@ -10310,7 +10310,7 @@
                 </a:solidFill>
                 <a:latin typeface="Arial"/>
               </a:rPr>
-              <a:t>Estes exemplos localizados não estimam a frequência da literatura. Quinze registros permanecem provisoriamente no núcleo; há 14 triagens S1/S2 e 11 apreciações por categoria, e o estudo 8 segue sem respostas até adjudicação da unidade. Um relatório não recuperado não recebeu MMAT; um registro foi excluído após resumo e um protocolo após texto completo.</a:t>
+              <a:t>Estes exemplos localizados não estimam a frequência da literatura. Quinze registros permanecem provisoriamente no núcleo; há 15 triagens S1/S2 e 15 apreciações por categoria, com rotas operacionais explicitamente limitadas. Um relatório não recuperado não recebeu MMAT; um registro foi excluído após resumo e um protocolo após texto completo.</a:t>
             </a:r>
           </a:p>
         </p:txBody>
@@ -12242,7 +12242,7 @@
               <a:t>• um único pesquisador
 • um texto integral pendente, sem MMAT
 • fontes e idiomas delimitados
-• MMAT: 14 triagens, 11 apreciações por categoria; estudo 8 sem avaliação
+• MMAT: 15 triagens e apreciações; rotas operacionais e conferência humana pendente
 • sem aplicação funcional ou eficácia pedagógica própria</a:t>
             </a:r>
           </a:p>

--- a/results/tcc/presentation/ensino_personalizado_de_matematica_tcc.pptx
+++ b/results/tcc/presentation/ensino_personalizado_de_matematica_tcc.pptx
@@ -5806,7 +5806,7 @@
                 <a:latin typeface="Arial"/>
               </a:rPr>
               <a:t>Instituto Federal Catarinense — Campus Videira
-Versão revisada: 15/10/2026 · corte da busca: 31/08/2026</a:t>
+Versão revisada: 28/10/2026 · corte da busca: 31/08/2026</a:t>
             </a:r>
           </a:p>
         </p:txBody>
@@ -11148,7 +11148,7 @@
                 </a:solidFill>
                 <a:latin typeface="Arial"/>
               </a:rPr>
-              <a:t>dados, modelos, métricas e limites</a:t>
+              <a:t>especificação conceitual; aplicação pendente</a:t>
             </a:r>
           </a:p>
         </p:txBody>
@@ -11433,7 +11433,7 @@
                 </a:solidFill>
                 <a:latin typeface="Arial"/>
               </a:rPr>
-              <a:t>O resultado é uma especificação conceitual: documentada, verificável e coerente com o escopo executado.</a:t>
+              <a:t>26 grupos rastreáveis: R02 separa conceitos; R20 exige separar treino, validação e teste.</a:t>
             </a:r>
           </a:p>
         </p:txBody>
@@ -12548,7 +12548,7 @@
                 <a:latin typeface="Arial"/>
               </a:rPr>
               <a:t>Thales Ferreira Batista · Ciência da Computação · IFC Videira
-Versão revisada: 15/10/2026 · corte da busca: 31/08/2026</a:t>
+Versão revisada: 28/10/2026 · corte da busca: 31/08/2026</a:t>
             </a:r>
           </a:p>
         </p:txBody>

--- a/results/tcc/presentation/ensino_personalizado_de_matematica_tcc.pptx
+++ b/results/tcc/presentation/ensino_personalizado_de_matematica_tcc.pptx
@@ -6739,8 +6739,8 @@
         </p:blipFill>
         <p:spPr>
           <a:xfrm>
-            <a:off x="7187460" y="1143000"/>
-            <a:ext cx="3455879" cy="2468880"/>
+            <a:off x="7090027" y="1143000"/>
+            <a:ext cx="3650745" cy="2468880"/>
           </a:xfrm>
           <a:prstGeom prst="rect">
             <a:avLst/>
@@ -7070,7 +7070,7 @@
                 </a:solidFill>
                 <a:latin typeface="Arial"/>
               </a:rPr>
-              <a:t>As quatro fontes foram complementares; os totais brutos incluem registros posteriormente reconhecidos como duplicatas.</a:t>
+              <a:t>As quatro fontes foram complementares; as contagens representam a fonte da versão mantida após a deduplicação DOI/URL (11.877 registros).</a:t>
             </a:r>
           </a:p>
         </p:txBody>
@@ -17577,8 +17577,8 @@
         </p:blipFill>
         <p:spPr>
           <a:xfrm>
-            <a:off x="1470660" y="960120"/>
-            <a:ext cx="9265920" cy="5212080"/>
+            <a:off x="2132511" y="960120"/>
+            <a:ext cx="7942217" cy="5212080"/>
           </a:xfrm>
           <a:prstGeom prst="rect">
             <a:avLst/>
@@ -17705,8 +17705,8 @@
         </p:blipFill>
         <p:spPr>
           <a:xfrm>
-            <a:off x="640080" y="1650666"/>
-            <a:ext cx="5623560" cy="3739548"/>
+            <a:off x="640080" y="1663204"/>
+            <a:ext cx="5623560" cy="3714472"/>
           </a:xfrm>
           <a:prstGeom prst="rect">
             <a:avLst/>

--- a/results/tcc/presentation/ensino_personalizado_de_matematica_tcc.pptx
+++ b/results/tcc/presentation/ensino_personalizado_de_matematica_tcc.pptx
@@ -5779,8 +5779,8 @@
         </p:nvSpPr>
         <p:spPr>
           <a:xfrm>
-            <a:off x="2057400" y="5806440"/>
-            <a:ext cx="8092440" cy="457200"/>
+            <a:off x="914400" y="5687568"/>
+            <a:ext cx="10332720" cy="640080"/>
           </a:xfrm>
           <a:prstGeom prst="rect">
             <a:avLst/>
@@ -5799,14 +5799,14 @@
               </a:spcAft>
             </a:pPr>
             <a:r>
-              <a:rPr sz="1150" b="0">
+              <a:rPr sz="1050" b="0">
                 <a:solidFill>
                   <a:srgbClr val="373737"/>
                 </a:solidFill>
                 <a:latin typeface="Arial"/>
               </a:rPr>
               <a:t>Instituto Federal Catarinense — Campus Videira
-Versão revisada: 28/10/2026 · corte da busca: 31/08/2026</a:t>
+Rascunho histórico, não usar na defesa · fluxo reconciliado em 31/10/2026 · reaplicação da emenda pendente</a:t>
             </a:r>
           </a:p>
         </p:txBody>
@@ -6629,7 +6629,7 @@
                 </a:solidFill>
                 <a:latin typeface="Arial"/>
               </a:rPr>
-              <a:t>As categorias podem se sobrepor e são calculadas sobre os 11.877 registros após a remoção determinística. Não representam qualidade ou eficácia.</a:t>
+              <a:t>As categorias podem se sobrepor e são calculadas sobre os 11.875 registros da seleção histórica reconciliada. Não representam qualidade ou eficácia.</a:t>
             </a:r>
           </a:p>
         </p:txBody>
@@ -7070,7 +7070,7 @@
                 </a:solidFill>
                 <a:latin typeface="Arial"/>
               </a:rPr>
-              <a:t>As quatro fontes foram complementares; as contagens representam a fonte da versão mantida após a deduplicação DOI/URL (11.877 registros).</a:t>
+              <a:t>As quatro fontes foram complementares; as contagens descrevem os 11.875 registros da população histórica após a reconciliação de identidade.</a:t>
             </a:r>
           </a:p>
         </p:txBody>
@@ -7338,7 +7338,7 @@
                 </a:solidFill>
                 <a:latin typeface="Arial"/>
               </a:rPr>
-              <a:t>registros retidos operacionalmente</a:t>
+              <a:t>registros na lista histórica de leitura</a:t>
             </a:r>
           </a:p>
         </p:txBody>
@@ -7502,7 +7502,7 @@
                 </a:solidFill>
                 <a:latin typeface="Arial"/>
               </a:rPr>
-              <a:t>registros empíricos mantidos provisoriamente</a:t>
+              <a:t>estudos históricos antes da emenda</a:t>
             </a:r>
           </a:p>
         </p:txBody>
@@ -7791,7 +7791,7 @@
                 </a:solidFill>
                 <a:latin typeface="Arial"/>
               </a:rPr>
-              <a:t>Desfecho da seleção</a:t>
+              <a:t>Desfecho histórico</a:t>
             </a:r>
           </a:p>
         </p:txBody>
@@ -7830,7 +7830,7 @@
                 </a:solidFill>
                 <a:latin typeface="Arial"/>
               </a:rPr>
-              <a:t>Dos 18 registros selecionados preliminarmente, um foi excluído após o resumo. Dos 17 relatórios procurados, um não foi recuperado e 16 foram avaliados em texto completo; um protocolo sem resultados concluídos foi excluído após essa avaliação e 15 registros empíricos permanecem provisoriamente no núcleo. Os 15 estudos têm apreciação preliminar, incluindo rotas operacionais explícitas; o relatório não recuperado não recebeu MMAT.</a:t>
+              <a:t>Dos 18 registros na lista antiga, um foi excluído após resumo. Dos 17 relatórios procurados, um não foi recuperado e 16 foram avaliados em texto completo; um protocolo foi excluído. Restaram 15 estudos na seleção histórica, ainda não reaplicada ao protocolo emendado. O MMAT precisa acompanhar a seleção revisada.</a:t>
             </a:r>
           </a:p>
         </p:txBody>
@@ -8548,7 +8548,7 @@
                 </a:solidFill>
                 <a:latin typeface="Arial"/>
               </a:rPr>
-              <a:t>Estado atual</a:t>
+              <a:t>Seleção histórica</a:t>
             </a:r>
           </a:p>
         </p:txBody>
@@ -8581,13 +8581,13 @@
               </a:spcAft>
             </a:pPr>
             <a:r>
-              <a:rPr sz="1300" b="0">
+              <a:rPr sz="1250" b="0">
                 <a:solidFill>
                   <a:srgbClr val="232323"/>
                 </a:solidFill>
                 <a:latin typeface="Arial"/>
               </a:rPr>
-              <a:t>15 registros provisórios. S1/S2 e Q1–Q5: 15. Estudos 5/7: categoria 3 operacional; 14: sorteio contraditório; 8: categoria 4 adaptada. Um texto não recuperado, sem MMAT. Conferência humana pendente.</a:t>
+              <a:t>15 estudos pré-emenda. S1/S2 e Q1–Q5: 15 conjuntos. Estudos 5/7: cat. 3 operacional; 14: sorteio contraditório; 8: cat. 4 adaptada. O relatório não recuperado não recebeu MMAT. Reaplicação e conferência humana pendentes.</a:t>
             </a:r>
           </a:p>
         </p:txBody>
@@ -10310,7 +10310,7 @@
                 </a:solidFill>
                 <a:latin typeface="Arial"/>
               </a:rPr>
-              <a:t>Estes exemplos localizados não estimam a frequência da literatura. Quinze registros permanecem provisoriamente no núcleo; há 15 triagens S1/S2 e 15 apreciações por categoria, com rotas operacionais explicitamente limitadas. Um relatório não recuperado não recebeu MMAT; um registro foi excluído após resumo e um protocolo após texto completo.</a:t>
+              <a:t>Exemplos da seleção histórica (n=15); não estimam a frequência da literatura. MMAT e síntese deverão ser reaplicados após a revisão do corpus. Um relatório não recuperado não recebeu MMAT; houve exclusões após resumo e texto completo.</a:t>
             </a:r>
           </a:p>
         </p:txBody>
@@ -12548,7 +12548,7 @@
                 <a:latin typeface="Arial"/>
               </a:rPr>
               <a:t>Thales Ferreira Batista · Ciência da Computação · IFC Videira
-Versão revisada: 28/10/2026 · corte da busca: 31/08/2026</a:t>
+Rascunho histórico, não usar na defesa · seleção pré-emenda</a:t>
             </a:r>
           </a:p>
         </p:txBody>
@@ -16264,7 +16264,7 @@
                 </a:solidFill>
                 <a:latin typeface="Arial"/>
               </a:rPr>
-              <a:t>Do registro bruto ao conjunto retido provisoriamente</a:t>
+              <a:t>Fluxo histórico antes da reaplicação</a:t>
             </a:r>
           </a:p>
         </p:txBody>
@@ -16278,7 +16278,7 @@
         <p:spPr>
           <a:xfrm>
             <a:off x="685800" y="960120"/>
-            <a:ext cx="4572000" cy="274320"/>
+            <a:ext cx="6858000" cy="274320"/>
           </a:xfrm>
           <a:prstGeom prst="rect">
             <a:avLst/>
@@ -16303,7 +16303,7 @@
                 </a:solidFill>
                 <a:latin typeface="Arial"/>
               </a:rPr>
-              <a:t>Contagens do recorte versionado</a:t>
+              <a:t>Fluxo histórico reconciliado em 31/10/2026</a:t>
             </a:r>
           </a:p>
         </p:txBody>
@@ -16592,7 +16592,7 @@
                 </a:solidFill>
                 <a:latin typeface="Arial"/>
               </a:rPr>
-              <a:t>27</a:t>
+              <a:t>29</a:t>
             </a:r>
           </a:p>
         </p:txBody>
@@ -16631,8 +16631,8 @@
                 </a:solidFill>
                 <a:latin typeface="Arial"/>
               </a:rPr>
-              <a:t>remoções por identidade
-25 DOI + 2 URL</a:t>
+              <a:t>duplicatas removidas
+27 DOI/URL + 2 confirmadas</a:t>
             </a:r>
           </a:p>
         </p:txBody>
@@ -16757,7 +16757,7 @@
                 </a:solidFill>
                 <a:latin typeface="Arial"/>
               </a:rPr>
-              <a:t>11.877</a:t>
+              <a:t>11.875</a:t>
             </a:r>
           </a:p>
         </p:txBody>
@@ -16796,7 +16796,7 @@
                 </a:solidFill>
                 <a:latin typeface="Arial"/>
               </a:rPr>
-              <a:t>registros na triagem</a:t>
+              <a:t>registros triados</a:t>
             </a:r>
           </a:p>
         </p:txBody>
@@ -16921,7 +16921,7 @@
                 </a:solidFill>
                 <a:latin typeface="Arial"/>
               </a:rPr>
-              <a:t>9.391</a:t>
+              <a:t>9.393</a:t>
             </a:r>
           </a:p>
         </p:txBody>
@@ -17085,7 +17085,7 @@
                 </a:solidFill>
                 <a:latin typeface="Arial"/>
               </a:rPr>
-              <a:t>2.486</a:t>
+              <a:t>2.482</a:t>
             </a:r>
           </a:p>
         </p:txBody>
@@ -17124,7 +17124,7 @@
                 </a:solidFill>
                 <a:latin typeface="Arial"/>
               </a:rPr>
-              <a:t>submetidos à priorização</a:t>
+              <a:t>priorizados no fluxo antigo</a:t>
             </a:r>
           </a:p>
         </p:txBody>
@@ -17249,7 +17249,7 @@
                 </a:solidFill>
                 <a:latin typeface="Arial"/>
               </a:rPr>
-              <a:t>2.468</a:t>
+              <a:t>2.464</a:t>
             </a:r>
           </a:p>
         </p:txBody>
@@ -17288,7 +17288,7 @@
                 </a:solidFill>
                 <a:latin typeface="Arial"/>
               </a:rPr>
-              <a:t>excluídos nessa etapa</a:t>
+              <a:t>não avançaram pelo corte antigo</a:t>
             </a:r>
           </a:p>
         </p:txBody>
@@ -17452,7 +17452,7 @@
                 </a:solidFill>
                 <a:latin typeface="Arial"/>
               </a:rPr>
-              <a:t>retidos operacionalmente</a:t>
+              <a:t>na lista histórica de leitura</a:t>
             </a:r>
           </a:p>
         </p:txBody>
@@ -17491,7 +17491,7 @@
                 </a:solidFill>
                 <a:latin typeface="Arial"/>
               </a:rPr>
-              <a:t>A priorização dos 2.486 registros usa metadados/resumos e não equivale à elegibilidade em texto completo; títulos repetidos seguem para auditoria semântica.</a:t>
+              <a:t>A seleção de 15 estudos e o corte 4,0 pertencem à execução anterior. A emenda remove o score como exclusão; sua reaplicação uniforme ainda está pendente.</a:t>
             </a:r>
           </a:p>
         </p:txBody>
@@ -17705,8 +17705,8 @@
         </p:blipFill>
         <p:spPr>
           <a:xfrm>
-            <a:off x="640080" y="1663204"/>
-            <a:ext cx="5623560" cy="3714472"/>
+            <a:off x="640080" y="1659043"/>
+            <a:ext cx="5623560" cy="3722793"/>
           </a:xfrm>
           <a:prstGeom prst="rect">
             <a:avLst/>
@@ -17872,7 +17872,7 @@
                 </a:solidFill>
                 <a:latin typeface="Arial"/>
               </a:rPr>
-              <a:t>27 linhas excedentes por identidade bibliográfica determinística: 25 DOI normalizado e 2 URL exata.</a:t>
+              <a:t>29 relatórios duplicados: 27 por DOI/URL e 2 confirmados manualmente como o mesmo relatório.</a:t>
             </a:r>
           </a:p>
         </p:txBody>
